--- a/KHBD_Tin_học/Lớp_7/Tuần_02/Slide_Tin_hoc_Lop_7_Bai01_Thiet_bi_vao_ra.pptx
+++ b/KHBD_Tin_học/Lớp_7/Tuần_02/Slide_Tin_hoc_Lop_7_Bai01_Thiet_bi_vao_ra.pptx
@@ -3389,6 +3389,12 @@
 <p:sld xmlns:a="http://schemas.openxmlformats.org/drawingml/2006/main" xmlns:p="http://schemas.openxmlformats.org/presentationml/2006/main" xmlns:r="http://schemas.openxmlformats.org/officeDocument/2006/relationships">
   <p:cSld>
     <p:spTree>
+      <p:nvGrpSpPr>
+        <p:cNvPr id="1" name=""/>
+        <p:cNvGrpSpPr/>
+        <p:nvPr/>
+      </p:nvGrpSpPr>
+      <p:grpSpPr/>
       <p:sp>
         <p:nvSpPr>
           <p:cNvPr id="3" name="Rectangle 2"/>
@@ -3475,12 +3481,6 @@
           </a:p>
         </p:txBody>
       </p:sp>
-      <p:nvGrpSpPr>
-        <p:cNvPr id="1" name=""/>
-        <p:cNvGrpSpPr/>
-        <p:nvPr/>
-      </p:nvGrpSpPr>
-      <p:grpSpPr/>
       <p:sp>
         <p:nvSpPr>
           <p:cNvPr id="4" name="TextBox 3"/>
@@ -3590,6 +3590,12 @@
 <p:sld xmlns:a="http://schemas.openxmlformats.org/drawingml/2006/main" xmlns:p="http://schemas.openxmlformats.org/presentationml/2006/main" xmlns:r="http://schemas.openxmlformats.org/officeDocument/2006/relationships">
   <p:cSld>
     <p:spTree>
+      <p:nvGrpSpPr>
+        <p:cNvPr id="1" name=""/>
+        <p:cNvGrpSpPr/>
+        <p:nvPr/>
+      </p:nvGrpSpPr>
+      <p:grpSpPr/>
       <p:sp>
         <p:nvSpPr>
           <p:cNvPr id="2" name="Rectangle 1"/>
@@ -3633,12 +3639,6 @@
           </a:p>
         </p:txBody>
       </p:sp>
-      <p:nvGrpSpPr>
-        <p:cNvPr id="1" name=""/>
-        <p:cNvGrpSpPr/>
-        <p:nvPr/>
-      </p:nvGrpSpPr>
-      <p:grpSpPr/>
       <p:sp>
         <p:nvSpPr>
           <p:cNvPr id="3" name="Rectangle 2"/>
@@ -3980,6 +3980,12 @@
 <p:sld xmlns:a="http://schemas.openxmlformats.org/drawingml/2006/main" xmlns:p="http://schemas.openxmlformats.org/presentationml/2006/main" xmlns:r="http://schemas.openxmlformats.org/officeDocument/2006/relationships">
   <p:cSld>
     <p:spTree>
+      <p:nvGrpSpPr>
+        <p:cNvPr id="1" name=""/>
+        <p:cNvGrpSpPr/>
+        <p:nvPr/>
+      </p:nvGrpSpPr>
+      <p:grpSpPr/>
       <p:sp>
         <p:nvSpPr>
           <p:cNvPr id="2" name="Rectangle 1"/>
@@ -4023,12 +4029,6 @@
           </a:p>
         </p:txBody>
       </p:sp>
-      <p:nvGrpSpPr>
-        <p:cNvPr id="1" name=""/>
-        <p:cNvGrpSpPr/>
-        <p:nvPr/>
-      </p:nvGrpSpPr>
-      <p:grpSpPr/>
       <p:sp>
         <p:nvSpPr>
           <p:cNvPr id="3" name="Rectangle 2"/>
@@ -4402,6 +4402,12 @@
 <p:sld xmlns:a="http://schemas.openxmlformats.org/drawingml/2006/main" xmlns:p="http://schemas.openxmlformats.org/presentationml/2006/main" xmlns:r="http://schemas.openxmlformats.org/officeDocument/2006/relationships">
   <p:cSld>
     <p:spTree>
+      <p:nvGrpSpPr>
+        <p:cNvPr id="1" name=""/>
+        <p:cNvGrpSpPr/>
+        <p:nvPr/>
+      </p:nvGrpSpPr>
+      <p:grpSpPr/>
       <p:sp>
         <p:nvSpPr>
           <p:cNvPr id="2" name="Rectangle 1"/>
@@ -4445,12 +4451,6 @@
           </a:p>
         </p:txBody>
       </p:sp>
-      <p:nvGrpSpPr>
-        <p:cNvPr id="1" name=""/>
-        <p:cNvGrpSpPr/>
-        <p:nvPr/>
-      </p:nvGrpSpPr>
-      <p:grpSpPr/>
       <p:sp>
         <p:nvSpPr>
           <p:cNvPr id="3" name="Rectangle 2"/>
@@ -4824,6 +4824,12 @@
 <p:sld xmlns:a="http://schemas.openxmlformats.org/drawingml/2006/main" xmlns:p="http://schemas.openxmlformats.org/presentationml/2006/main" xmlns:r="http://schemas.openxmlformats.org/officeDocument/2006/relationships">
   <p:cSld>
     <p:spTree>
+      <p:nvGrpSpPr>
+        <p:cNvPr id="1" name=""/>
+        <p:cNvGrpSpPr/>
+        <p:nvPr/>
+      </p:nvGrpSpPr>
+      <p:grpSpPr/>
       <p:sp>
         <p:nvSpPr>
           <p:cNvPr id="2" name="Rectangle 1"/>
@@ -4867,12 +4873,6 @@
           </a:p>
         </p:txBody>
       </p:sp>
-      <p:nvGrpSpPr>
-        <p:cNvPr id="1" name=""/>
-        <p:cNvGrpSpPr/>
-        <p:nvPr/>
-      </p:nvGrpSpPr>
-      <p:grpSpPr/>
       <p:sp>
         <p:nvSpPr>
           <p:cNvPr id="3" name="Rectangle 2"/>
@@ -5246,6 +5246,12 @@
 <p:sld xmlns:a="http://schemas.openxmlformats.org/drawingml/2006/main" xmlns:p="http://schemas.openxmlformats.org/presentationml/2006/main" xmlns:r="http://schemas.openxmlformats.org/officeDocument/2006/relationships">
   <p:cSld>
     <p:spTree>
+      <p:nvGrpSpPr>
+        <p:cNvPr id="1" name=""/>
+        <p:cNvGrpSpPr/>
+        <p:nvPr/>
+      </p:nvGrpSpPr>
+      <p:grpSpPr/>
       <p:sp>
         <p:nvSpPr>
           <p:cNvPr id="2" name="Rectangle 1"/>
@@ -5289,12 +5295,6 @@
           </a:p>
         </p:txBody>
       </p:sp>
-      <p:nvGrpSpPr>
-        <p:cNvPr id="1" name=""/>
-        <p:cNvGrpSpPr/>
-        <p:nvPr/>
-      </p:nvGrpSpPr>
-      <p:grpSpPr/>
       <p:sp>
         <p:nvSpPr>
           <p:cNvPr id="3" name="Rectangle 2"/>
@@ -5862,6 +5862,12 @@
 <p:sld xmlns:a="http://schemas.openxmlformats.org/drawingml/2006/main" xmlns:p="http://schemas.openxmlformats.org/presentationml/2006/main" xmlns:r="http://schemas.openxmlformats.org/officeDocument/2006/relationships">
   <p:cSld>
     <p:spTree>
+      <p:nvGrpSpPr>
+        <p:cNvPr id="1" name=""/>
+        <p:cNvGrpSpPr/>
+        <p:nvPr/>
+      </p:nvGrpSpPr>
+      <p:grpSpPr/>
       <p:sp>
         <p:nvSpPr>
           <p:cNvPr id="2" name="Rectangle 1"/>
@@ -5905,12 +5911,6 @@
           </a:p>
         </p:txBody>
       </p:sp>
-      <p:nvGrpSpPr>
-        <p:cNvPr id="1" name=""/>
-        <p:cNvGrpSpPr/>
-        <p:nvPr/>
-      </p:nvGrpSpPr>
-      <p:grpSpPr/>
       <p:sp>
         <p:nvSpPr>
           <p:cNvPr id="3" name="Rectangle 2"/>
@@ -6174,6 +6174,12 @@
 <p:sld xmlns:a="http://schemas.openxmlformats.org/drawingml/2006/main" xmlns:p="http://schemas.openxmlformats.org/presentationml/2006/main" xmlns:r="http://schemas.openxmlformats.org/officeDocument/2006/relationships">
   <p:cSld>
     <p:spTree>
+      <p:nvGrpSpPr>
+        <p:cNvPr id="1" name=""/>
+        <p:cNvGrpSpPr/>
+        <p:nvPr/>
+      </p:nvGrpSpPr>
+      <p:grpSpPr/>
       <p:sp>
         <p:nvSpPr>
           <p:cNvPr id="2" name="Rectangle 1"/>
@@ -6217,12 +6223,6 @@
           </a:p>
         </p:txBody>
       </p:sp>
-      <p:nvGrpSpPr>
-        <p:cNvPr id="1" name=""/>
-        <p:cNvGrpSpPr/>
-        <p:nvPr/>
-      </p:nvGrpSpPr>
-      <p:grpSpPr/>
       <p:sp>
         <p:nvSpPr>
           <p:cNvPr id="3" name="Rounded Rectangle 2"/>
@@ -6886,6 +6886,12 @@
 <p:sld xmlns:a="http://schemas.openxmlformats.org/drawingml/2006/main" xmlns:p="http://schemas.openxmlformats.org/presentationml/2006/main" xmlns:r="http://schemas.openxmlformats.org/officeDocument/2006/relationships">
   <p:cSld>
     <p:spTree>
+      <p:nvGrpSpPr>
+        <p:cNvPr id="1" name=""/>
+        <p:cNvGrpSpPr/>
+        <p:nvPr/>
+      </p:nvGrpSpPr>
+      <p:grpSpPr/>
       <p:sp>
         <p:nvSpPr>
           <p:cNvPr id="2" name="Rectangle 1"/>
@@ -6929,12 +6935,6 @@
           </a:p>
         </p:txBody>
       </p:sp>
-      <p:nvGrpSpPr>
-        <p:cNvPr id="1" name=""/>
-        <p:cNvGrpSpPr/>
-        <p:nvPr/>
-      </p:nvGrpSpPr>
-      <p:grpSpPr/>
       <p:sp>
         <p:nvSpPr>
           <p:cNvPr id="3" name="TextBox 2"/>

--- a/KHBD_Tin_học/Lớp_7/Tuần_02/Slide_Tin_hoc_Lop_7_Bai01_Thiet_bi_vao_ra.pptx
+++ b/KHBD_Tin_học/Lớp_7/Tuần_02/Slide_Tin_hoc_Lop_7_Bai01_Thiet_bi_vao_ra.pptx
@@ -3489,8 +3489,8 @@
         </p:nvSpPr>
         <p:spPr>
           <a:xfrm>
-            <a:off x="1371600" y="2011680"/>
-            <a:ext cx="9445752" cy="1371600"/>
+            <a:off x="731520" y="1828800"/>
+            <a:ext cx="6858000" cy="1371600"/>
           </a:xfrm>
           <a:prstGeom prst="rect">
             <a:avLst/>
@@ -3503,9 +3503,9 @@
           </a:bodyPr>
           <a:lstStyle/>
           <a:p>
-            <a:pPr algn="ctr"/>
-            <a:r>
-              <a:rPr sz="3600" b="1">
+            <a:pPr algn="l"/>
+            <a:r>
+              <a:rPr sz="3400" b="1">
                 <a:solidFill>
                   <a:srgbClr val="FFFFFF"/>
                 </a:solidFill>
@@ -3524,8 +3524,8 @@
         </p:nvSpPr>
         <p:spPr>
           <a:xfrm>
-            <a:off x="1371600" y="3657600"/>
-            <a:ext cx="9445752" cy="731520"/>
+            <a:off x="731520" y="3474720"/>
+            <a:ext cx="6858000" cy="731520"/>
           </a:xfrm>
           <a:prstGeom prst="rect">
             <a:avLst/>
@@ -3538,7 +3538,7 @@
           </a:bodyPr>
           <a:lstStyle/>
           <a:p>
-            <a:pPr algn="ctr"/>
+            <a:pPr algn="l"/>
             <a:r>
               <a:rPr sz="2000" b="0">
                 <a:solidFill>
@@ -3726,7 +3726,7 @@
         <p:spPr>
           <a:xfrm>
             <a:off x="457200" y="1600200"/>
-            <a:ext cx="11274552" cy="594360"/>
+            <a:ext cx="7315200" cy="594360"/>
           </a:xfrm>
           <a:prstGeom prst="rect">
             <a:avLst/>
@@ -3846,8 +3846,8 @@
         </p:nvSpPr>
         <p:spPr>
           <a:xfrm>
-            <a:off x="731520" y="2423160"/>
-            <a:ext cx="6309360" cy="3108960"/>
+            <a:off x="731520" y="2468880"/>
+            <a:ext cx="6309360" cy="3017520"/>
           </a:xfrm>
           <a:prstGeom prst="rect">
             <a:avLst/>
@@ -3866,13 +3866,13 @@
               </a:spcAft>
             </a:pPr>
             <a:r>
-              <a:rPr sz="1800" b="0">
+              <a:rPr sz="2000" b="0">
                 <a:solidFill>
                   <a:srgbClr val="0C4A6E"/>
                 </a:solidFill>
                 <a:latin typeface="Arial"/>
               </a:rPr>
-              <a:t>Nhìn quanh phòng máy:</a:t>
+              <a:t>Hãy nhìn quanh phòng máy tính:</a:t>
             </a:r>
           </a:p>
           <a:p>
@@ -3882,13 +3882,13 @@
               </a:spcAft>
             </a:pPr>
             <a:r>
-              <a:rPr sz="1800" b="0">
+              <a:rPr sz="2000" b="0">
                 <a:solidFill>
                   <a:srgbClr val="0C4A6E"/>
                 </a:solidFill>
                 <a:latin typeface="Arial"/>
               </a:rPr>
-              <a:t>"Kể tên TẤT CẢ thiết bị em thấy</a:t>
+              <a:t>Kể tên TẤT CẢ các thiết bị em nhìn thấy kết nối với máy tính!</a:t>
             </a:r>
           </a:p>
           <a:p>
@@ -3898,45 +3898,13 @@
               </a:spcAft>
             </a:pPr>
             <a:r>
-              <a:rPr sz="1800" b="0">
+              <a:rPr sz="2000" b="0">
                 <a:solidFill>
                   <a:srgbClr val="0C4A6E"/>
                 </a:solidFill>
                 <a:latin typeface="Arial"/>
               </a:rPr>
-              <a:t>xung quanh chiếc máy tính!"</a:t>
-            </a:r>
-          </a:p>
-          <a:p>
-            <a:pPr algn="l">
-              <a:spcAft>
-                <a:spcPts val="600"/>
-              </a:spcAft>
-            </a:pPr>
-            <a:r>
-              <a:rPr sz="1800" b="0">
-                <a:solidFill>
-                  <a:srgbClr val="0C4A6E"/>
-                </a:solidFill>
-                <a:latin typeface="Arial"/>
-              </a:rPr>
-              <a:t/>
-            </a:r>
-          </a:p>
-          <a:p>
-            <a:pPr algn="l">
-              <a:spcAft>
-                <a:spcPts val="600"/>
-              </a:spcAft>
-            </a:pPr>
-            <a:r>
-              <a:rPr sz="1800" b="0">
-                <a:solidFill>
-                  <a:srgbClr val="0C4A6E"/>
-                </a:solidFill>
-                <a:latin typeface="Arial"/>
-              </a:rPr>
-              <a:t>2 phút — càng nhiều càng tốt!</a:t>
+              <a:t>Thiết bị nào đưa thông tin vào, thiết bị nào đưa thông tin ra?</a:t>
             </a:r>
           </a:p>
         </p:txBody>
@@ -4137,7 +4105,7 @@
                 </a:solidFill>
                 <a:latin typeface="Arial"/>
               </a:rPr>
-              <a:t>Thiết bị vào (Input) là gì?</a:t>
+              <a:t>Thiết bị vào (Input Devices)</a:t>
             </a:r>
           </a:p>
         </p:txBody>
@@ -4150,8 +4118,8 @@
         </p:nvSpPr>
         <p:spPr>
           <a:xfrm>
-            <a:off x="365760" y="2286000"/>
-            <a:ext cx="6858000" cy="3383279"/>
+            <a:off x="457200" y="2331720"/>
+            <a:ext cx="11274552" cy="708659"/>
           </a:xfrm>
           <a:prstGeom prst="roundRect">
             <a:avLst/>
@@ -4159,8 +4127,10 @@
           <a:solidFill>
             <a:srgbClr val="FFFFFF"/>
           </a:solidFill>
-          <a:ln>
-            <a:noFill/>
+          <a:ln w="12700">
+            <a:solidFill>
+              <a:srgbClr val="D0D5DD"/>
+            </a:solidFill>
           </a:ln>
         </p:spPr>
         <p:style>
@@ -4193,8 +4163,8 @@
         </p:nvSpPr>
         <p:spPr>
           <a:xfrm>
-            <a:off x="365760" y="2286000"/>
-            <a:ext cx="109728" cy="3383279"/>
+            <a:off x="457200" y="2331720"/>
+            <a:ext cx="109728" cy="708659"/>
           </a:xfrm>
           <a:prstGeom prst="rect">
             <a:avLst/>
@@ -4228,144 +4198,9 @@
           </a:p>
         </p:txBody>
       </p:sp>
-      <p:sp>
-        <p:nvSpPr>
-          <p:cNvPr id="8" name="TextBox 7"/>
-          <p:cNvSpPr txBox="1"/>
-          <p:nvPr/>
-        </p:nvSpPr>
-        <p:spPr>
-          <a:xfrm>
-            <a:off x="731520" y="2423160"/>
-            <a:ext cx="6309360" cy="3108960"/>
-          </a:xfrm>
-          <a:prstGeom prst="rect">
-            <a:avLst/>
-          </a:prstGeom>
-          <a:noFill/>
-        </p:spPr>
-        <p:txBody>
-          <a:bodyPr wrap="square">
-            <a:spAutoFit/>
-          </a:bodyPr>
-          <a:lstStyle/>
-          <a:p>
-            <a:pPr algn="l">
-              <a:spcAft>
-                <a:spcPts val="600"/>
-              </a:spcAft>
-            </a:pPr>
-            <a:r>
-              <a:rPr sz="1800" b="0">
-                <a:solidFill>
-                  <a:srgbClr val="0C4A6E"/>
-                </a:solidFill>
-                <a:latin typeface="Arial"/>
-              </a:rPr>
-              <a:t>Thiết bị vào = đưa thông tin VÀO máy tính</a:t>
-            </a:r>
-          </a:p>
-          <a:p>
-            <a:pPr algn="l">
-              <a:spcAft>
-                <a:spcPts val="600"/>
-              </a:spcAft>
-            </a:pPr>
-            <a:r>
-              <a:rPr sz="1800" b="0">
-                <a:solidFill>
-                  <a:srgbClr val="0C4A6E"/>
-                </a:solidFill>
-                <a:latin typeface="Arial"/>
-              </a:rPr>
-              <a:t/>
-            </a:r>
-          </a:p>
-          <a:p>
-            <a:pPr algn="l">
-              <a:spcAft>
-                <a:spcPts val="600"/>
-              </a:spcAft>
-            </a:pPr>
-            <a:r>
-              <a:rPr sz="1800" b="0">
-                <a:solidFill>
-                  <a:srgbClr val="0C4A6E"/>
-                </a:solidFill>
-                <a:latin typeface="Arial"/>
-              </a:rPr>
-              <a:t>● Bàn phím (Keyboard) — gõ chữ, số</a:t>
-            </a:r>
-          </a:p>
-          <a:p>
-            <a:pPr algn="l">
-              <a:spcAft>
-                <a:spcPts val="600"/>
-              </a:spcAft>
-            </a:pPr>
-            <a:r>
-              <a:rPr sz="1800" b="0">
-                <a:solidFill>
-                  <a:srgbClr val="0C4A6E"/>
-                </a:solidFill>
-                <a:latin typeface="Arial"/>
-              </a:rPr>
-              <a:t>● Chuột (Mouse) — chỉ, nhấp, kéo thả</a:t>
-            </a:r>
-          </a:p>
-          <a:p>
-            <a:pPr algn="l">
-              <a:spcAft>
-                <a:spcPts val="600"/>
-              </a:spcAft>
-            </a:pPr>
-            <a:r>
-              <a:rPr sz="1800" b="0">
-                <a:solidFill>
-                  <a:srgbClr val="0C4A6E"/>
-                </a:solidFill>
-                <a:latin typeface="Arial"/>
-              </a:rPr>
-              <a:t>● Microphone — thu âm giọng nói</a:t>
-            </a:r>
-          </a:p>
-          <a:p>
-            <a:pPr algn="l">
-              <a:spcAft>
-                <a:spcPts val="600"/>
-              </a:spcAft>
-            </a:pPr>
-            <a:r>
-              <a:rPr sz="1800" b="0">
-                <a:solidFill>
-                  <a:srgbClr val="0C4A6E"/>
-                </a:solidFill>
-                <a:latin typeface="Arial"/>
-              </a:rPr>
-              <a:t>● Webcam — thu hình ảnh</a:t>
-            </a:r>
-          </a:p>
-          <a:p>
-            <a:pPr algn="l">
-              <a:spcAft>
-                <a:spcPts val="600"/>
-              </a:spcAft>
-            </a:pPr>
-            <a:r>
-              <a:rPr sz="1800" b="0">
-                <a:solidFill>
-                  <a:srgbClr val="0C4A6E"/>
-                </a:solidFill>
-                <a:latin typeface="Arial"/>
-              </a:rPr>
-              <a:t>● Máy quét (Scanner) — quét tài liệu</a:t>
-            </a:r>
-          </a:p>
-        </p:txBody>
-      </p:sp>
       <p:pic>
         <p:nvPicPr>
-          <p:cNvPr id="9" name="Picture 8" descr="bai1_p11_img1.jpeg"/>
+          <p:cNvPr id="8" name="Picture 7" descr="bai1_p10_img1.jpeg"/>
           <p:cNvPicPr>
             <a:picLocks noChangeAspect="1"/>
           </p:cNvPicPr>
@@ -4379,21 +4214,497 @@
         </p:blipFill>
         <p:spPr>
           <a:xfrm>
-            <a:off x="7589520" y="2286000"/>
-            <a:ext cx="4114799" cy="3383279"/>
+            <a:off x="731520" y="2423160"/>
+            <a:ext cx="1645920" cy="525779"/>
           </a:xfrm>
           <a:prstGeom prst="rect">
             <a:avLst/>
           </a:prstGeom>
         </p:spPr>
       </p:pic>
+      <p:sp>
+        <p:nvSpPr>
+          <p:cNvPr id="9" name="TextBox 8"/>
+          <p:cNvSpPr txBox="1"/>
+          <p:nvPr/>
+        </p:nvSpPr>
+        <p:spPr>
+          <a:xfrm>
+            <a:off x="2651760" y="2468879"/>
+            <a:ext cx="8897112" cy="434339"/>
+          </a:xfrm>
+          <a:prstGeom prst="rect">
+            <a:avLst/>
+          </a:prstGeom>
+          <a:noFill/>
+        </p:spPr>
+        <p:txBody>
+          <a:bodyPr wrap="square">
+            <a:spAutoFit/>
+          </a:bodyPr>
+          <a:lstStyle/>
+          <a:p>
+            <a:pPr algn="l"/>
+            <a:r>
+              <a:rPr sz="1700" b="0">
+                <a:solidFill>
+                  <a:srgbClr val="0C4A6E"/>
+                </a:solidFill>
+                <a:latin typeface="Arial"/>
+              </a:rPr>
+              <a:t>● Bàn phím (Keyboard) — nhập dữ liệu văn bản và lệnh</a:t>
+            </a:r>
+          </a:p>
+        </p:txBody>
+      </p:sp>
+      <p:sp>
+        <p:nvSpPr>
+          <p:cNvPr id="10" name="Rounded Rectangle 9"/>
+          <p:cNvSpPr/>
+          <p:nvPr/>
+        </p:nvSpPr>
+        <p:spPr>
+          <a:xfrm>
+            <a:off x="457200" y="3223259"/>
+            <a:ext cx="11274552" cy="708659"/>
+          </a:xfrm>
+          <a:prstGeom prst="roundRect">
+            <a:avLst/>
+          </a:prstGeom>
+          <a:solidFill>
+            <a:srgbClr val="FFFFFF"/>
+          </a:solidFill>
+          <a:ln w="12700">
+            <a:solidFill>
+              <a:srgbClr val="D0D5DD"/>
+            </a:solidFill>
+          </a:ln>
+        </p:spPr>
+        <p:style>
+          <a:lnRef idx="1">
+            <a:schemeClr val="accent1"/>
+          </a:lnRef>
+          <a:fillRef idx="3">
+            <a:schemeClr val="accent1"/>
+          </a:fillRef>
+          <a:effectRef idx="2">
+            <a:schemeClr val="accent1"/>
+          </a:effectRef>
+          <a:fontRef idx="minor">
+            <a:schemeClr val="lt1"/>
+          </a:fontRef>
+        </p:style>
+        <p:txBody>
+          <a:bodyPr rtlCol="0" anchor="ctr"/>
+          <a:lstStyle/>
+          <a:p>
+            <a:pPr algn="ctr"/>
+          </a:p>
+        </p:txBody>
+      </p:sp>
+      <p:sp>
+        <p:nvSpPr>
+          <p:cNvPr id="11" name="Rectangle 10"/>
+          <p:cNvSpPr/>
+          <p:nvPr/>
+        </p:nvSpPr>
+        <p:spPr>
+          <a:xfrm>
+            <a:off x="457200" y="3223259"/>
+            <a:ext cx="109728" cy="708659"/>
+          </a:xfrm>
+          <a:prstGeom prst="rect">
+            <a:avLst/>
+          </a:prstGeom>
+          <a:solidFill>
+            <a:srgbClr val="0EA5E9"/>
+          </a:solidFill>
+          <a:ln>
+            <a:noFill/>
+          </a:ln>
+        </p:spPr>
+        <p:style>
+          <a:lnRef idx="1">
+            <a:schemeClr val="accent1"/>
+          </a:lnRef>
+          <a:fillRef idx="3">
+            <a:schemeClr val="accent1"/>
+          </a:fillRef>
+          <a:effectRef idx="2">
+            <a:schemeClr val="accent1"/>
+          </a:effectRef>
+          <a:fontRef idx="minor">
+            <a:schemeClr val="lt1"/>
+          </a:fontRef>
+        </p:style>
+        <p:txBody>
+          <a:bodyPr rtlCol="0" anchor="ctr"/>
+          <a:lstStyle/>
+          <a:p>
+            <a:pPr algn="ctr"/>
+          </a:p>
+        </p:txBody>
+      </p:sp>
+      <p:pic>
+        <p:nvPicPr>
+          <p:cNvPr id="12" name="Picture 11" descr="bai1_p11_img1.jpeg"/>
+          <p:cNvPicPr>
+            <a:picLocks noChangeAspect="1"/>
+          </p:cNvPicPr>
+          <p:nvPr/>
+        </p:nvPicPr>
+        <p:blipFill>
+          <a:blip r:embed="rId3"/>
+          <a:stretch>
+            <a:fillRect/>
+          </a:stretch>
+        </p:blipFill>
+        <p:spPr>
+          <a:xfrm>
+            <a:off x="731520" y="3314699"/>
+            <a:ext cx="1645920" cy="525779"/>
+          </a:xfrm>
+          <a:prstGeom prst="rect">
+            <a:avLst/>
+          </a:prstGeom>
+        </p:spPr>
+      </p:pic>
+      <p:sp>
+        <p:nvSpPr>
+          <p:cNvPr id="13" name="TextBox 12"/>
+          <p:cNvSpPr txBox="1"/>
+          <p:nvPr/>
+        </p:nvSpPr>
+        <p:spPr>
+          <a:xfrm>
+            <a:off x="2651760" y="3360419"/>
+            <a:ext cx="8897112" cy="434339"/>
+          </a:xfrm>
+          <a:prstGeom prst="rect">
+            <a:avLst/>
+          </a:prstGeom>
+          <a:noFill/>
+        </p:spPr>
+        <p:txBody>
+          <a:bodyPr wrap="square">
+            <a:spAutoFit/>
+          </a:bodyPr>
+          <a:lstStyle/>
+          <a:p>
+            <a:pPr algn="l"/>
+            <a:r>
+              <a:rPr sz="1700" b="0">
+                <a:solidFill>
+                  <a:srgbClr val="0C4A6E"/>
+                </a:solidFill>
+                <a:latin typeface="Arial"/>
+              </a:rPr>
+              <a:t>● Chuột (Mouse) — điều khiển con trỏ và thao tác chọn</a:t>
+            </a:r>
+          </a:p>
+        </p:txBody>
+      </p:sp>
+      <p:sp>
+        <p:nvSpPr>
+          <p:cNvPr id="14" name="Rounded Rectangle 13"/>
+          <p:cNvSpPr/>
+          <p:nvPr/>
+        </p:nvSpPr>
+        <p:spPr>
+          <a:xfrm>
+            <a:off x="457200" y="4114800"/>
+            <a:ext cx="11274552" cy="708660"/>
+          </a:xfrm>
+          <a:prstGeom prst="roundRect">
+            <a:avLst/>
+          </a:prstGeom>
+          <a:solidFill>
+            <a:srgbClr val="FFFFFF"/>
+          </a:solidFill>
+          <a:ln w="12700">
+            <a:solidFill>
+              <a:srgbClr val="D0D5DD"/>
+            </a:solidFill>
+          </a:ln>
+        </p:spPr>
+        <p:style>
+          <a:lnRef idx="1">
+            <a:schemeClr val="accent1"/>
+          </a:lnRef>
+          <a:fillRef idx="3">
+            <a:schemeClr val="accent1"/>
+          </a:fillRef>
+          <a:effectRef idx="2">
+            <a:schemeClr val="accent1"/>
+          </a:effectRef>
+          <a:fontRef idx="minor">
+            <a:schemeClr val="lt1"/>
+          </a:fontRef>
+        </p:style>
+        <p:txBody>
+          <a:bodyPr rtlCol="0" anchor="ctr"/>
+          <a:lstStyle/>
+          <a:p>
+            <a:pPr algn="ctr"/>
+          </a:p>
+        </p:txBody>
+      </p:sp>
+      <p:sp>
+        <p:nvSpPr>
+          <p:cNvPr id="15" name="Rectangle 14"/>
+          <p:cNvSpPr/>
+          <p:nvPr/>
+        </p:nvSpPr>
+        <p:spPr>
+          <a:xfrm>
+            <a:off x="457200" y="4114800"/>
+            <a:ext cx="109728" cy="708660"/>
+          </a:xfrm>
+          <a:prstGeom prst="rect">
+            <a:avLst/>
+          </a:prstGeom>
+          <a:solidFill>
+            <a:srgbClr val="0EA5E9"/>
+          </a:solidFill>
+          <a:ln>
+            <a:noFill/>
+          </a:ln>
+        </p:spPr>
+        <p:style>
+          <a:lnRef idx="1">
+            <a:schemeClr val="accent1"/>
+          </a:lnRef>
+          <a:fillRef idx="3">
+            <a:schemeClr val="accent1"/>
+          </a:fillRef>
+          <a:effectRef idx="2">
+            <a:schemeClr val="accent1"/>
+          </a:effectRef>
+          <a:fontRef idx="minor">
+            <a:schemeClr val="lt1"/>
+          </a:fontRef>
+        </p:style>
+        <p:txBody>
+          <a:bodyPr rtlCol="0" anchor="ctr"/>
+          <a:lstStyle/>
+          <a:p>
+            <a:pPr algn="ctr"/>
+          </a:p>
+        </p:txBody>
+      </p:sp>
+      <p:pic>
+        <p:nvPicPr>
+          <p:cNvPr id="16" name="Picture 15" descr="bai1_p12_img1.jpeg"/>
+          <p:cNvPicPr>
+            <a:picLocks noChangeAspect="1"/>
+          </p:cNvPicPr>
+          <p:nvPr/>
+        </p:nvPicPr>
+        <p:blipFill>
+          <a:blip r:embed="rId4"/>
+          <a:stretch>
+            <a:fillRect/>
+          </a:stretch>
+        </p:blipFill>
+        <p:spPr>
+          <a:xfrm>
+            <a:off x="731520" y="4206240"/>
+            <a:ext cx="1645920" cy="525780"/>
+          </a:xfrm>
+          <a:prstGeom prst="rect">
+            <a:avLst/>
+          </a:prstGeom>
+        </p:spPr>
+      </p:pic>
+      <p:sp>
+        <p:nvSpPr>
+          <p:cNvPr id="17" name="TextBox 16"/>
+          <p:cNvSpPr txBox="1"/>
+          <p:nvPr/>
+        </p:nvSpPr>
+        <p:spPr>
+          <a:xfrm>
+            <a:off x="2651760" y="4251960"/>
+            <a:ext cx="8897112" cy="434339"/>
+          </a:xfrm>
+          <a:prstGeom prst="rect">
+            <a:avLst/>
+          </a:prstGeom>
+          <a:noFill/>
+        </p:spPr>
+        <p:txBody>
+          <a:bodyPr wrap="square">
+            <a:spAutoFit/>
+          </a:bodyPr>
+          <a:lstStyle/>
+          <a:p>
+            <a:pPr algn="l"/>
+            <a:r>
+              <a:rPr sz="1700" b="0">
+                <a:solidFill>
+                  <a:srgbClr val="0C4A6E"/>
+                </a:solidFill>
+                <a:latin typeface="Arial"/>
+              </a:rPr>
+              <a:t>● Microphone &amp; Webcam — thu âm thanh và hình ảnh trực tiếp</a:t>
+            </a:r>
+          </a:p>
+        </p:txBody>
+      </p:sp>
+      <p:sp>
+        <p:nvSpPr>
+          <p:cNvPr id="18" name="Rounded Rectangle 17"/>
+          <p:cNvSpPr/>
+          <p:nvPr/>
+        </p:nvSpPr>
+        <p:spPr>
+          <a:xfrm>
+            <a:off x="457200" y="5006340"/>
+            <a:ext cx="11274552" cy="708660"/>
+          </a:xfrm>
+          <a:prstGeom prst="roundRect">
+            <a:avLst/>
+          </a:prstGeom>
+          <a:solidFill>
+            <a:srgbClr val="FFFFFF"/>
+          </a:solidFill>
+          <a:ln w="12700">
+            <a:solidFill>
+              <a:srgbClr val="D0D5DD"/>
+            </a:solidFill>
+          </a:ln>
+        </p:spPr>
+        <p:style>
+          <a:lnRef idx="1">
+            <a:schemeClr val="accent1"/>
+          </a:lnRef>
+          <a:fillRef idx="3">
+            <a:schemeClr val="accent1"/>
+          </a:fillRef>
+          <a:effectRef idx="2">
+            <a:schemeClr val="accent1"/>
+          </a:effectRef>
+          <a:fontRef idx="minor">
+            <a:schemeClr val="lt1"/>
+          </a:fontRef>
+        </p:style>
+        <p:txBody>
+          <a:bodyPr rtlCol="0" anchor="ctr"/>
+          <a:lstStyle/>
+          <a:p>
+            <a:pPr algn="ctr"/>
+          </a:p>
+        </p:txBody>
+      </p:sp>
+      <p:sp>
+        <p:nvSpPr>
+          <p:cNvPr id="19" name="Rectangle 18"/>
+          <p:cNvSpPr/>
+          <p:nvPr/>
+        </p:nvSpPr>
+        <p:spPr>
+          <a:xfrm>
+            <a:off x="457200" y="5006340"/>
+            <a:ext cx="109728" cy="708660"/>
+          </a:xfrm>
+          <a:prstGeom prst="rect">
+            <a:avLst/>
+          </a:prstGeom>
+          <a:solidFill>
+            <a:srgbClr val="0EA5E9"/>
+          </a:solidFill>
+          <a:ln>
+            <a:noFill/>
+          </a:ln>
+        </p:spPr>
+        <p:style>
+          <a:lnRef idx="1">
+            <a:schemeClr val="accent1"/>
+          </a:lnRef>
+          <a:fillRef idx="3">
+            <a:schemeClr val="accent1"/>
+          </a:fillRef>
+          <a:effectRef idx="2">
+            <a:schemeClr val="accent1"/>
+          </a:effectRef>
+          <a:fontRef idx="minor">
+            <a:schemeClr val="lt1"/>
+          </a:fontRef>
+        </p:style>
+        <p:txBody>
+          <a:bodyPr rtlCol="0" anchor="ctr"/>
+          <a:lstStyle/>
+          <a:p>
+            <a:pPr algn="ctr"/>
+          </a:p>
+        </p:txBody>
+      </p:sp>
+      <p:pic>
+        <p:nvPicPr>
+          <p:cNvPr id="20" name="Picture 19" descr="bai1_p13_img1.jpeg"/>
+          <p:cNvPicPr>
+            <a:picLocks noChangeAspect="1"/>
+          </p:cNvPicPr>
+          <p:nvPr/>
+        </p:nvPicPr>
+        <p:blipFill>
+          <a:blip r:embed="rId5"/>
+          <a:stretch>
+            <a:fillRect/>
+          </a:stretch>
+        </p:blipFill>
+        <p:spPr>
+          <a:xfrm>
+            <a:off x="731520" y="5097779"/>
+            <a:ext cx="1645920" cy="525780"/>
+          </a:xfrm>
+          <a:prstGeom prst="rect">
+            <a:avLst/>
+          </a:prstGeom>
+        </p:spPr>
+      </p:pic>
+      <p:sp>
+        <p:nvSpPr>
+          <p:cNvPr id="21" name="TextBox 20"/>
+          <p:cNvSpPr txBox="1"/>
+          <p:nvPr/>
+        </p:nvSpPr>
+        <p:spPr>
+          <a:xfrm>
+            <a:off x="2651760" y="5143500"/>
+            <a:ext cx="8897112" cy="434339"/>
+          </a:xfrm>
+          <a:prstGeom prst="rect">
+            <a:avLst/>
+          </a:prstGeom>
+          <a:noFill/>
+        </p:spPr>
+        <p:txBody>
+          <a:bodyPr wrap="square">
+            <a:spAutoFit/>
+          </a:bodyPr>
+          <a:lstStyle/>
+          <a:p>
+            <a:pPr algn="l"/>
+            <a:r>
+              <a:rPr sz="1700" b="0">
+                <a:solidFill>
+                  <a:srgbClr val="0C4A6E"/>
+                </a:solidFill>
+                <a:latin typeface="Arial"/>
+              </a:rPr>
+              <a:t>● Máy quét (Scanner) — chuyển văn bản giấy thành dữ liệu số</a:t>
+            </a:r>
+          </a:p>
+        </p:txBody>
+      </p:sp>
     </p:spTree>
   </p:cSld>
   <p:clrMapOvr>
     <a:masterClrMapping/>
   </p:clrMapOvr>
   <p:transition spd="med">
-    <p:push dir="l"/>
+    <p:wipe/>
   </p:transition>
 </p:sld>
 </file>
@@ -4559,7 +4870,7 @@
                 </a:solidFill>
                 <a:latin typeface="Arial"/>
               </a:rPr>
-              <a:t>Thiết bị ra (Output) là gì?</a:t>
+              <a:t>Thiết bị ra (Output Devices)</a:t>
             </a:r>
           </a:p>
         </p:txBody>
@@ -4572,8 +4883,8 @@
         </p:nvSpPr>
         <p:spPr>
           <a:xfrm>
-            <a:off x="365760" y="2286000"/>
-            <a:ext cx="6858000" cy="3383279"/>
+            <a:off x="457200" y="2331720"/>
+            <a:ext cx="11274552" cy="708659"/>
           </a:xfrm>
           <a:prstGeom prst="roundRect">
             <a:avLst/>
@@ -4581,8 +4892,10 @@
           <a:solidFill>
             <a:srgbClr val="FFFFFF"/>
           </a:solidFill>
-          <a:ln>
-            <a:noFill/>
+          <a:ln w="12700">
+            <a:solidFill>
+              <a:srgbClr val="D0D5DD"/>
+            </a:solidFill>
           </a:ln>
         </p:spPr>
         <p:style>
@@ -4615,8 +4928,8 @@
         </p:nvSpPr>
         <p:spPr>
           <a:xfrm>
-            <a:off x="365760" y="2286000"/>
-            <a:ext cx="109728" cy="3383279"/>
+            <a:off x="457200" y="2331720"/>
+            <a:ext cx="109728" cy="708659"/>
           </a:xfrm>
           <a:prstGeom prst="rect">
             <a:avLst/>
@@ -4650,144 +4963,9 @@
           </a:p>
         </p:txBody>
       </p:sp>
-      <p:sp>
-        <p:nvSpPr>
-          <p:cNvPr id="8" name="TextBox 7"/>
-          <p:cNvSpPr txBox="1"/>
-          <p:nvPr/>
-        </p:nvSpPr>
-        <p:spPr>
-          <a:xfrm>
-            <a:off x="731520" y="2423160"/>
-            <a:ext cx="6309360" cy="3108960"/>
-          </a:xfrm>
-          <a:prstGeom prst="rect">
-            <a:avLst/>
-          </a:prstGeom>
-          <a:noFill/>
-        </p:spPr>
-        <p:txBody>
-          <a:bodyPr wrap="square">
-            <a:spAutoFit/>
-          </a:bodyPr>
-          <a:lstStyle/>
-          <a:p>
-            <a:pPr algn="l">
-              <a:spcAft>
-                <a:spcPts val="600"/>
-              </a:spcAft>
-            </a:pPr>
-            <a:r>
-              <a:rPr sz="1800" b="0">
-                <a:solidFill>
-                  <a:srgbClr val="0C4A6E"/>
-                </a:solidFill>
-                <a:latin typeface="Arial"/>
-              </a:rPr>
-              <a:t>Thiết bị ra = đưa thông tin RA cho người dùng</a:t>
-            </a:r>
-          </a:p>
-          <a:p>
-            <a:pPr algn="l">
-              <a:spcAft>
-                <a:spcPts val="600"/>
-              </a:spcAft>
-            </a:pPr>
-            <a:r>
-              <a:rPr sz="1800" b="0">
-                <a:solidFill>
-                  <a:srgbClr val="0C4A6E"/>
-                </a:solidFill>
-                <a:latin typeface="Arial"/>
-              </a:rPr>
-              <a:t/>
-            </a:r>
-          </a:p>
-          <a:p>
-            <a:pPr algn="l">
-              <a:spcAft>
-                <a:spcPts val="600"/>
-              </a:spcAft>
-            </a:pPr>
-            <a:r>
-              <a:rPr sz="1800" b="0">
-                <a:solidFill>
-                  <a:srgbClr val="0C4A6E"/>
-                </a:solidFill>
-                <a:latin typeface="Arial"/>
-              </a:rPr>
-              <a:t>● Màn hình (Monitor) — hiển thị hình ảnh</a:t>
-            </a:r>
-          </a:p>
-          <a:p>
-            <a:pPr algn="l">
-              <a:spcAft>
-                <a:spcPts val="600"/>
-              </a:spcAft>
-            </a:pPr>
-            <a:r>
-              <a:rPr sz="1800" b="0">
-                <a:solidFill>
-                  <a:srgbClr val="0C4A6E"/>
-                </a:solidFill>
-                <a:latin typeface="Arial"/>
-              </a:rPr>
-              <a:t>● Loa (Speaker) — phát âm thanh</a:t>
-            </a:r>
-          </a:p>
-          <a:p>
-            <a:pPr algn="l">
-              <a:spcAft>
-                <a:spcPts val="600"/>
-              </a:spcAft>
-            </a:pPr>
-            <a:r>
-              <a:rPr sz="1800" b="0">
-                <a:solidFill>
-                  <a:srgbClr val="0C4A6E"/>
-                </a:solidFill>
-                <a:latin typeface="Arial"/>
-              </a:rPr>
-              <a:t>● Máy in (Printer) — in tài liệu</a:t>
-            </a:r>
-          </a:p>
-          <a:p>
-            <a:pPr algn="l">
-              <a:spcAft>
-                <a:spcPts val="600"/>
-              </a:spcAft>
-            </a:pPr>
-            <a:r>
-              <a:rPr sz="1800" b="0">
-                <a:solidFill>
-                  <a:srgbClr val="0C4A6E"/>
-                </a:solidFill>
-                <a:latin typeface="Arial"/>
-              </a:rPr>
-              <a:t>● Tai nghe (Headphone) — nghe âm thanh</a:t>
-            </a:r>
-          </a:p>
-          <a:p>
-            <a:pPr algn="l">
-              <a:spcAft>
-                <a:spcPts val="600"/>
-              </a:spcAft>
-            </a:pPr>
-            <a:r>
-              <a:rPr sz="1800" b="0">
-                <a:solidFill>
-                  <a:srgbClr val="0C4A6E"/>
-                </a:solidFill>
-                <a:latin typeface="Arial"/>
-              </a:rPr>
-              <a:t>● Máy chiếu (Projector) — chiếu lên màn</a:t>
-            </a:r>
-          </a:p>
-        </p:txBody>
-      </p:sp>
       <p:pic>
         <p:nvPicPr>
-          <p:cNvPr id="9" name="Picture 8" descr="bai1_p11_img1.jpeg"/>
+          <p:cNvPr id="8" name="Picture 7" descr="bai1_p13_img1.jpeg"/>
           <p:cNvPicPr>
             <a:picLocks noChangeAspect="1"/>
           </p:cNvPicPr>
@@ -4801,14 +4979,490 @@
         </p:blipFill>
         <p:spPr>
           <a:xfrm>
-            <a:off x="7589520" y="2286000"/>
-            <a:ext cx="4114799" cy="3383279"/>
+            <a:off x="731520" y="2423160"/>
+            <a:ext cx="1645920" cy="525779"/>
           </a:xfrm>
           <a:prstGeom prst="rect">
             <a:avLst/>
           </a:prstGeom>
         </p:spPr>
       </p:pic>
+      <p:sp>
+        <p:nvSpPr>
+          <p:cNvPr id="9" name="TextBox 8"/>
+          <p:cNvSpPr txBox="1"/>
+          <p:nvPr/>
+        </p:nvSpPr>
+        <p:spPr>
+          <a:xfrm>
+            <a:off x="2651760" y="2468879"/>
+            <a:ext cx="8897112" cy="434339"/>
+          </a:xfrm>
+          <a:prstGeom prst="rect">
+            <a:avLst/>
+          </a:prstGeom>
+          <a:noFill/>
+        </p:spPr>
+        <p:txBody>
+          <a:bodyPr wrap="square">
+            <a:spAutoFit/>
+          </a:bodyPr>
+          <a:lstStyle/>
+          <a:p>
+            <a:pPr algn="l"/>
+            <a:r>
+              <a:rPr sz="1700" b="0">
+                <a:solidFill>
+                  <a:srgbClr val="0C4A6E"/>
+                </a:solidFill>
+                <a:latin typeface="Arial"/>
+              </a:rPr>
+              <a:t>● Màn hình (Monitor) — hiển thị kết quả xử lý trực quan</a:t>
+            </a:r>
+          </a:p>
+        </p:txBody>
+      </p:sp>
+      <p:sp>
+        <p:nvSpPr>
+          <p:cNvPr id="10" name="Rounded Rectangle 9"/>
+          <p:cNvSpPr/>
+          <p:nvPr/>
+        </p:nvSpPr>
+        <p:spPr>
+          <a:xfrm>
+            <a:off x="457200" y="3223259"/>
+            <a:ext cx="11274552" cy="708659"/>
+          </a:xfrm>
+          <a:prstGeom prst="roundRect">
+            <a:avLst/>
+          </a:prstGeom>
+          <a:solidFill>
+            <a:srgbClr val="FFFFFF"/>
+          </a:solidFill>
+          <a:ln w="12700">
+            <a:solidFill>
+              <a:srgbClr val="D0D5DD"/>
+            </a:solidFill>
+          </a:ln>
+        </p:spPr>
+        <p:style>
+          <a:lnRef idx="1">
+            <a:schemeClr val="accent1"/>
+          </a:lnRef>
+          <a:fillRef idx="3">
+            <a:schemeClr val="accent1"/>
+          </a:fillRef>
+          <a:effectRef idx="2">
+            <a:schemeClr val="accent1"/>
+          </a:effectRef>
+          <a:fontRef idx="minor">
+            <a:schemeClr val="lt1"/>
+          </a:fontRef>
+        </p:style>
+        <p:txBody>
+          <a:bodyPr rtlCol="0" anchor="ctr"/>
+          <a:lstStyle/>
+          <a:p>
+            <a:pPr algn="ctr"/>
+          </a:p>
+        </p:txBody>
+      </p:sp>
+      <p:sp>
+        <p:nvSpPr>
+          <p:cNvPr id="11" name="Rectangle 10"/>
+          <p:cNvSpPr/>
+          <p:nvPr/>
+        </p:nvSpPr>
+        <p:spPr>
+          <a:xfrm>
+            <a:off x="457200" y="3223259"/>
+            <a:ext cx="109728" cy="708659"/>
+          </a:xfrm>
+          <a:prstGeom prst="rect">
+            <a:avLst/>
+          </a:prstGeom>
+          <a:solidFill>
+            <a:srgbClr val="0EA5E9"/>
+          </a:solidFill>
+          <a:ln>
+            <a:noFill/>
+          </a:ln>
+        </p:spPr>
+        <p:style>
+          <a:lnRef idx="1">
+            <a:schemeClr val="accent1"/>
+          </a:lnRef>
+          <a:fillRef idx="3">
+            <a:schemeClr val="accent1"/>
+          </a:fillRef>
+          <a:effectRef idx="2">
+            <a:schemeClr val="accent1"/>
+          </a:effectRef>
+          <a:fontRef idx="minor">
+            <a:schemeClr val="lt1"/>
+          </a:fontRef>
+        </p:style>
+        <p:txBody>
+          <a:bodyPr rtlCol="0" anchor="ctr"/>
+          <a:lstStyle/>
+          <a:p>
+            <a:pPr algn="ctr"/>
+          </a:p>
+        </p:txBody>
+      </p:sp>
+      <p:pic>
+        <p:nvPicPr>
+          <p:cNvPr id="12" name="Picture 11" descr="bai1_p6_img1.jpeg"/>
+          <p:cNvPicPr>
+            <a:picLocks noChangeAspect="1"/>
+          </p:cNvPicPr>
+          <p:nvPr/>
+        </p:nvPicPr>
+        <p:blipFill>
+          <a:blip r:embed="rId3"/>
+          <a:stretch>
+            <a:fillRect/>
+          </a:stretch>
+        </p:blipFill>
+        <p:spPr>
+          <a:xfrm>
+            <a:off x="731520" y="3314699"/>
+            <a:ext cx="1645920" cy="525779"/>
+          </a:xfrm>
+          <a:prstGeom prst="rect">
+            <a:avLst/>
+          </a:prstGeom>
+        </p:spPr>
+      </p:pic>
+      <p:sp>
+        <p:nvSpPr>
+          <p:cNvPr id="13" name="TextBox 12"/>
+          <p:cNvSpPr txBox="1"/>
+          <p:nvPr/>
+        </p:nvSpPr>
+        <p:spPr>
+          <a:xfrm>
+            <a:off x="2651760" y="3360419"/>
+            <a:ext cx="8897112" cy="434339"/>
+          </a:xfrm>
+          <a:prstGeom prst="rect">
+            <a:avLst/>
+          </a:prstGeom>
+          <a:noFill/>
+        </p:spPr>
+        <p:txBody>
+          <a:bodyPr wrap="square">
+            <a:spAutoFit/>
+          </a:bodyPr>
+          <a:lstStyle/>
+          <a:p>
+            <a:pPr algn="l"/>
+            <a:r>
+              <a:rPr sz="1700" b="0">
+                <a:solidFill>
+                  <a:srgbClr val="0C4A6E"/>
+                </a:solidFill>
+                <a:latin typeface="Arial"/>
+              </a:rPr>
+              <a:t>● Loa &amp; Tai nghe (Speaker/Headphone) — phát tín hiệu âm thanh</a:t>
+            </a:r>
+          </a:p>
+        </p:txBody>
+      </p:sp>
+      <p:sp>
+        <p:nvSpPr>
+          <p:cNvPr id="14" name="Rounded Rectangle 13"/>
+          <p:cNvSpPr/>
+          <p:nvPr/>
+        </p:nvSpPr>
+        <p:spPr>
+          <a:xfrm>
+            <a:off x="457200" y="4114800"/>
+            <a:ext cx="11274552" cy="708660"/>
+          </a:xfrm>
+          <a:prstGeom prst="roundRect">
+            <a:avLst/>
+          </a:prstGeom>
+          <a:solidFill>
+            <a:srgbClr val="FFFFFF"/>
+          </a:solidFill>
+          <a:ln w="12700">
+            <a:solidFill>
+              <a:srgbClr val="D0D5DD"/>
+            </a:solidFill>
+          </a:ln>
+        </p:spPr>
+        <p:style>
+          <a:lnRef idx="1">
+            <a:schemeClr val="accent1"/>
+          </a:lnRef>
+          <a:fillRef idx="3">
+            <a:schemeClr val="accent1"/>
+          </a:fillRef>
+          <a:effectRef idx="2">
+            <a:schemeClr val="accent1"/>
+          </a:effectRef>
+          <a:fontRef idx="minor">
+            <a:schemeClr val="lt1"/>
+          </a:fontRef>
+        </p:style>
+        <p:txBody>
+          <a:bodyPr rtlCol="0" anchor="ctr"/>
+          <a:lstStyle/>
+          <a:p>
+            <a:pPr algn="ctr"/>
+          </a:p>
+        </p:txBody>
+      </p:sp>
+      <p:sp>
+        <p:nvSpPr>
+          <p:cNvPr id="15" name="Rectangle 14"/>
+          <p:cNvSpPr/>
+          <p:nvPr/>
+        </p:nvSpPr>
+        <p:spPr>
+          <a:xfrm>
+            <a:off x="457200" y="4114800"/>
+            <a:ext cx="109728" cy="708660"/>
+          </a:xfrm>
+          <a:prstGeom prst="rect">
+            <a:avLst/>
+          </a:prstGeom>
+          <a:solidFill>
+            <a:srgbClr val="0EA5E9"/>
+          </a:solidFill>
+          <a:ln>
+            <a:noFill/>
+          </a:ln>
+        </p:spPr>
+        <p:style>
+          <a:lnRef idx="1">
+            <a:schemeClr val="accent1"/>
+          </a:lnRef>
+          <a:fillRef idx="3">
+            <a:schemeClr val="accent1"/>
+          </a:fillRef>
+          <a:effectRef idx="2">
+            <a:schemeClr val="accent1"/>
+          </a:effectRef>
+          <a:fontRef idx="minor">
+            <a:schemeClr val="lt1"/>
+          </a:fontRef>
+        </p:style>
+        <p:txBody>
+          <a:bodyPr rtlCol="0" anchor="ctr"/>
+          <a:lstStyle/>
+          <a:p>
+            <a:pPr algn="ctr"/>
+          </a:p>
+        </p:txBody>
+      </p:sp>
+      <p:pic>
+        <p:nvPicPr>
+          <p:cNvPr id="16" name="Picture 15" descr="bai1_p7_img1.jpeg"/>
+          <p:cNvPicPr>
+            <a:picLocks noChangeAspect="1"/>
+          </p:cNvPicPr>
+          <p:nvPr/>
+        </p:nvPicPr>
+        <p:blipFill>
+          <a:blip r:embed="rId4"/>
+          <a:stretch>
+            <a:fillRect/>
+          </a:stretch>
+        </p:blipFill>
+        <p:spPr>
+          <a:xfrm>
+            <a:off x="731520" y="4206240"/>
+            <a:ext cx="1645920" cy="525780"/>
+          </a:xfrm>
+          <a:prstGeom prst="rect">
+            <a:avLst/>
+          </a:prstGeom>
+        </p:spPr>
+      </p:pic>
+      <p:sp>
+        <p:nvSpPr>
+          <p:cNvPr id="17" name="TextBox 16"/>
+          <p:cNvSpPr txBox="1"/>
+          <p:nvPr/>
+        </p:nvSpPr>
+        <p:spPr>
+          <a:xfrm>
+            <a:off x="2651760" y="4251960"/>
+            <a:ext cx="8897112" cy="434339"/>
+          </a:xfrm>
+          <a:prstGeom prst="rect">
+            <a:avLst/>
+          </a:prstGeom>
+          <a:noFill/>
+        </p:spPr>
+        <p:txBody>
+          <a:bodyPr wrap="square">
+            <a:spAutoFit/>
+          </a:bodyPr>
+          <a:lstStyle/>
+          <a:p>
+            <a:pPr algn="l"/>
+            <a:r>
+              <a:rPr sz="1700" b="0">
+                <a:solidFill>
+                  <a:srgbClr val="0C4A6E"/>
+                </a:solidFill>
+                <a:latin typeface="Arial"/>
+              </a:rPr>
+              <a:t>● Máy in (Printer) — in dữ liệu ra bản giấy</a:t>
+            </a:r>
+          </a:p>
+        </p:txBody>
+      </p:sp>
+      <p:sp>
+        <p:nvSpPr>
+          <p:cNvPr id="18" name="Rounded Rectangle 17"/>
+          <p:cNvSpPr/>
+          <p:nvPr/>
+        </p:nvSpPr>
+        <p:spPr>
+          <a:xfrm>
+            <a:off x="457200" y="5006340"/>
+            <a:ext cx="11274552" cy="708660"/>
+          </a:xfrm>
+          <a:prstGeom prst="roundRect">
+            <a:avLst/>
+          </a:prstGeom>
+          <a:solidFill>
+            <a:srgbClr val="FFFFFF"/>
+          </a:solidFill>
+          <a:ln w="12700">
+            <a:solidFill>
+              <a:srgbClr val="D0D5DD"/>
+            </a:solidFill>
+          </a:ln>
+        </p:spPr>
+        <p:style>
+          <a:lnRef idx="1">
+            <a:schemeClr val="accent1"/>
+          </a:lnRef>
+          <a:fillRef idx="3">
+            <a:schemeClr val="accent1"/>
+          </a:fillRef>
+          <a:effectRef idx="2">
+            <a:schemeClr val="accent1"/>
+          </a:effectRef>
+          <a:fontRef idx="minor">
+            <a:schemeClr val="lt1"/>
+          </a:fontRef>
+        </p:style>
+        <p:txBody>
+          <a:bodyPr rtlCol="0" anchor="ctr"/>
+          <a:lstStyle/>
+          <a:p>
+            <a:pPr algn="ctr"/>
+          </a:p>
+        </p:txBody>
+      </p:sp>
+      <p:sp>
+        <p:nvSpPr>
+          <p:cNvPr id="19" name="Rectangle 18"/>
+          <p:cNvSpPr/>
+          <p:nvPr/>
+        </p:nvSpPr>
+        <p:spPr>
+          <a:xfrm>
+            <a:off x="457200" y="5006340"/>
+            <a:ext cx="109728" cy="708660"/>
+          </a:xfrm>
+          <a:prstGeom prst="rect">
+            <a:avLst/>
+          </a:prstGeom>
+          <a:solidFill>
+            <a:srgbClr val="0EA5E9"/>
+          </a:solidFill>
+          <a:ln>
+            <a:noFill/>
+          </a:ln>
+        </p:spPr>
+        <p:style>
+          <a:lnRef idx="1">
+            <a:schemeClr val="accent1"/>
+          </a:lnRef>
+          <a:fillRef idx="3">
+            <a:schemeClr val="accent1"/>
+          </a:fillRef>
+          <a:effectRef idx="2">
+            <a:schemeClr val="accent1"/>
+          </a:effectRef>
+          <a:fontRef idx="minor">
+            <a:schemeClr val="lt1"/>
+          </a:fontRef>
+        </p:style>
+        <p:txBody>
+          <a:bodyPr rtlCol="0" anchor="ctr"/>
+          <a:lstStyle/>
+          <a:p>
+            <a:pPr algn="ctr"/>
+          </a:p>
+        </p:txBody>
+      </p:sp>
+      <p:pic>
+        <p:nvPicPr>
+          <p:cNvPr id="20" name="Picture 19" descr="bai1_p8_img1.jpeg"/>
+          <p:cNvPicPr>
+            <a:picLocks noChangeAspect="1"/>
+          </p:cNvPicPr>
+          <p:nvPr/>
+        </p:nvPicPr>
+        <p:blipFill>
+          <a:blip r:embed="rId5"/>
+          <a:stretch>
+            <a:fillRect/>
+          </a:stretch>
+        </p:blipFill>
+        <p:spPr>
+          <a:xfrm>
+            <a:off x="731520" y="5097779"/>
+            <a:ext cx="1645920" cy="525780"/>
+          </a:xfrm>
+          <a:prstGeom prst="rect">
+            <a:avLst/>
+          </a:prstGeom>
+        </p:spPr>
+      </p:pic>
+      <p:sp>
+        <p:nvSpPr>
+          <p:cNvPr id="21" name="TextBox 20"/>
+          <p:cNvSpPr txBox="1"/>
+          <p:nvPr/>
+        </p:nvSpPr>
+        <p:spPr>
+          <a:xfrm>
+            <a:off x="2651760" y="5143500"/>
+            <a:ext cx="8897112" cy="434339"/>
+          </a:xfrm>
+          <a:prstGeom prst="rect">
+            <a:avLst/>
+          </a:prstGeom>
+          <a:noFill/>
+        </p:spPr>
+        <p:txBody>
+          <a:bodyPr wrap="square">
+            <a:spAutoFit/>
+          </a:bodyPr>
+          <a:lstStyle/>
+          <a:p>
+            <a:pPr algn="l"/>
+            <a:r>
+              <a:rPr sz="1700" b="0">
+                <a:solidFill>
+                  <a:srgbClr val="0C4A6E"/>
+                </a:solidFill>
+                <a:latin typeface="Arial"/>
+              </a:rPr>
+              <a:t>● Máy chiếu (Projector) — trình chiếu nội dung lên màn rộng</a:t>
+            </a:r>
+          </a:p>
+        </p:txBody>
+      </p:sp>
     </p:spTree>
   </p:cSld>
   <p:clrMapOvr>
@@ -4981,7 +5635,7 @@
                 </a:solidFill>
                 <a:latin typeface="Arial"/>
               </a:rPr>
-              <a:t>Input → Xử lý → Output</a:t>
+              <a:t>Sơ đồ hoạt động Input → Processing → Output</a:t>
             </a:r>
           </a:p>
         </p:txBody>
@@ -4994,8 +5648,8 @@
         </p:nvSpPr>
         <p:spPr>
           <a:xfrm>
-            <a:off x="365760" y="2286000"/>
-            <a:ext cx="6858000" cy="3383279"/>
+            <a:off x="457200" y="2331720"/>
+            <a:ext cx="11274552" cy="1005839"/>
           </a:xfrm>
           <a:prstGeom prst="roundRect">
             <a:avLst/>
@@ -5003,8 +5657,10 @@
           <a:solidFill>
             <a:srgbClr val="FFFFFF"/>
           </a:solidFill>
-          <a:ln>
-            <a:noFill/>
+          <a:ln w="12700">
+            <a:solidFill>
+              <a:srgbClr val="D0D5DD"/>
+            </a:solidFill>
           </a:ln>
         </p:spPr>
         <p:style>
@@ -5037,8 +5693,8 @@
         </p:nvSpPr>
         <p:spPr>
           <a:xfrm>
-            <a:off x="365760" y="2286000"/>
-            <a:ext cx="109728" cy="3383279"/>
+            <a:off x="457200" y="2331720"/>
+            <a:ext cx="109728" cy="1005839"/>
           </a:xfrm>
           <a:prstGeom prst="rect">
             <a:avLst/>
@@ -5072,144 +5728,9 @@
           </a:p>
         </p:txBody>
       </p:sp>
-      <p:sp>
-        <p:nvSpPr>
-          <p:cNvPr id="8" name="TextBox 7"/>
-          <p:cNvSpPr txBox="1"/>
-          <p:nvPr/>
-        </p:nvSpPr>
-        <p:spPr>
-          <a:xfrm>
-            <a:off x="731520" y="2423160"/>
-            <a:ext cx="6309360" cy="3108960"/>
-          </a:xfrm>
-          <a:prstGeom prst="rect">
-            <a:avLst/>
-          </a:prstGeom>
-          <a:noFill/>
-        </p:spPr>
-        <p:txBody>
-          <a:bodyPr wrap="square">
-            <a:spAutoFit/>
-          </a:bodyPr>
-          <a:lstStyle/>
-          <a:p>
-            <a:pPr algn="l">
-              <a:spcAft>
-                <a:spcPts val="600"/>
-              </a:spcAft>
-            </a:pPr>
-            <a:r>
-              <a:rPr sz="1800" b="0">
-                <a:solidFill>
-                  <a:srgbClr val="0C4A6E"/>
-                </a:solidFill>
-                <a:latin typeface="Arial"/>
-              </a:rPr>
-              <a:t>Quy trình hoạt động:</a:t>
-            </a:r>
-          </a:p>
-          <a:p>
-            <a:pPr algn="l">
-              <a:spcAft>
-                <a:spcPts val="600"/>
-              </a:spcAft>
-            </a:pPr>
-            <a:r>
-              <a:rPr sz="1800" b="0">
-                <a:solidFill>
-                  <a:srgbClr val="0C4A6E"/>
-                </a:solidFill>
-                <a:latin typeface="Arial"/>
-              </a:rPr>
-              <a:t/>
-            </a:r>
-          </a:p>
-          <a:p>
-            <a:pPr algn="l">
-              <a:spcAft>
-                <a:spcPts val="600"/>
-              </a:spcAft>
-            </a:pPr>
-            <a:r>
-              <a:rPr sz="1800" b="0">
-                <a:solidFill>
-                  <a:srgbClr val="0C4A6E"/>
-                </a:solidFill>
-                <a:latin typeface="Arial"/>
-              </a:rPr>
-              <a:t>Bàn phím → CPU xử lý → Màn hình</a:t>
-            </a:r>
-          </a:p>
-          <a:p>
-            <a:pPr algn="l">
-              <a:spcAft>
-                <a:spcPts val="600"/>
-              </a:spcAft>
-            </a:pPr>
-            <a:r>
-              <a:rPr sz="1800" b="0">
-                <a:solidFill>
-                  <a:srgbClr val="0C4A6E"/>
-                </a:solidFill>
-                <a:latin typeface="Arial"/>
-              </a:rPr>
-              <a:t>(Input)      (Processing)    (Output)</a:t>
-            </a:r>
-          </a:p>
-          <a:p>
-            <a:pPr algn="l">
-              <a:spcAft>
-                <a:spcPts val="600"/>
-              </a:spcAft>
-            </a:pPr>
-            <a:r>
-              <a:rPr sz="1800" b="0">
-                <a:solidFill>
-                  <a:srgbClr val="0C4A6E"/>
-                </a:solidFill>
-                <a:latin typeface="Arial"/>
-              </a:rPr>
-              <a:t/>
-            </a:r>
-          </a:p>
-          <a:p>
-            <a:pPr algn="l">
-              <a:spcAft>
-                <a:spcPts val="600"/>
-              </a:spcAft>
-            </a:pPr>
-            <a:r>
-              <a:rPr sz="1800" b="0">
-                <a:solidFill>
-                  <a:srgbClr val="0C4A6E"/>
-                </a:solidFill>
-                <a:latin typeface="Arial"/>
-              </a:rPr>
-              <a:t>Một số thiết bị vừa vào vừa ra:</a:t>
-            </a:r>
-          </a:p>
-          <a:p>
-            <a:pPr algn="l">
-              <a:spcAft>
-                <a:spcPts val="600"/>
-              </a:spcAft>
-            </a:pPr>
-            <a:r>
-              <a:rPr sz="1800" b="0">
-                <a:solidFill>
-                  <a:srgbClr val="0C4A6E"/>
-                </a:solidFill>
-                <a:latin typeface="Arial"/>
-              </a:rPr>
-              <a:t>Màn hình cảm ứng, USB, Ổ cứng ngoài</a:t>
-            </a:r>
-          </a:p>
-        </p:txBody>
-      </p:sp>
       <p:pic>
         <p:nvPicPr>
-          <p:cNvPr id="9" name="Picture 8" descr="bai1_p11_img1.jpeg"/>
+          <p:cNvPr id="8" name="Picture 7" descr="bai1_p8_img1.jpeg"/>
           <p:cNvPicPr>
             <a:picLocks noChangeAspect="1"/>
           </p:cNvPicPr>
@@ -5223,21 +5744,350 @@
         </p:blipFill>
         <p:spPr>
           <a:xfrm>
-            <a:off x="7589520" y="2286000"/>
-            <a:ext cx="4114799" cy="3383279"/>
+            <a:off x="731520" y="2423160"/>
+            <a:ext cx="1645920" cy="822959"/>
           </a:xfrm>
           <a:prstGeom prst="rect">
             <a:avLst/>
           </a:prstGeom>
         </p:spPr>
       </p:pic>
+      <p:sp>
+        <p:nvSpPr>
+          <p:cNvPr id="9" name="TextBox 8"/>
+          <p:cNvSpPr txBox="1"/>
+          <p:nvPr/>
+        </p:nvSpPr>
+        <p:spPr>
+          <a:xfrm>
+            <a:off x="2651760" y="2468879"/>
+            <a:ext cx="8897112" cy="731519"/>
+          </a:xfrm>
+          <a:prstGeom prst="rect">
+            <a:avLst/>
+          </a:prstGeom>
+          <a:noFill/>
+        </p:spPr>
+        <p:txBody>
+          <a:bodyPr wrap="square">
+            <a:spAutoFit/>
+          </a:bodyPr>
+          <a:lstStyle/>
+          <a:p>
+            <a:pPr algn="l"/>
+            <a:r>
+              <a:rPr sz="1700" b="0">
+                <a:solidFill>
+                  <a:srgbClr val="0C4A6E"/>
+                </a:solidFill>
+                <a:latin typeface="Arial"/>
+              </a:rPr>
+              <a:t>● Thiết bị Vào (Input) tiếp nhận thông tin từ người dùng</a:t>
+            </a:r>
+          </a:p>
+        </p:txBody>
+      </p:sp>
+      <p:sp>
+        <p:nvSpPr>
+          <p:cNvPr id="10" name="Rounded Rectangle 9"/>
+          <p:cNvSpPr/>
+          <p:nvPr/>
+        </p:nvSpPr>
+        <p:spPr>
+          <a:xfrm>
+            <a:off x="457200" y="3520439"/>
+            <a:ext cx="11274552" cy="1005839"/>
+          </a:xfrm>
+          <a:prstGeom prst="roundRect">
+            <a:avLst/>
+          </a:prstGeom>
+          <a:solidFill>
+            <a:srgbClr val="FFFFFF"/>
+          </a:solidFill>
+          <a:ln w="12700">
+            <a:solidFill>
+              <a:srgbClr val="D0D5DD"/>
+            </a:solidFill>
+          </a:ln>
+        </p:spPr>
+        <p:style>
+          <a:lnRef idx="1">
+            <a:schemeClr val="accent1"/>
+          </a:lnRef>
+          <a:fillRef idx="3">
+            <a:schemeClr val="accent1"/>
+          </a:fillRef>
+          <a:effectRef idx="2">
+            <a:schemeClr val="accent1"/>
+          </a:effectRef>
+          <a:fontRef idx="minor">
+            <a:schemeClr val="lt1"/>
+          </a:fontRef>
+        </p:style>
+        <p:txBody>
+          <a:bodyPr rtlCol="0" anchor="ctr"/>
+          <a:lstStyle/>
+          <a:p>
+            <a:pPr algn="ctr"/>
+          </a:p>
+        </p:txBody>
+      </p:sp>
+      <p:sp>
+        <p:nvSpPr>
+          <p:cNvPr id="11" name="Rectangle 10"/>
+          <p:cNvSpPr/>
+          <p:nvPr/>
+        </p:nvSpPr>
+        <p:spPr>
+          <a:xfrm>
+            <a:off x="457200" y="3520439"/>
+            <a:ext cx="109728" cy="1005839"/>
+          </a:xfrm>
+          <a:prstGeom prst="rect">
+            <a:avLst/>
+          </a:prstGeom>
+          <a:solidFill>
+            <a:srgbClr val="0EA5E9"/>
+          </a:solidFill>
+          <a:ln>
+            <a:noFill/>
+          </a:ln>
+        </p:spPr>
+        <p:style>
+          <a:lnRef idx="1">
+            <a:schemeClr val="accent1"/>
+          </a:lnRef>
+          <a:fillRef idx="3">
+            <a:schemeClr val="accent1"/>
+          </a:fillRef>
+          <a:effectRef idx="2">
+            <a:schemeClr val="accent1"/>
+          </a:effectRef>
+          <a:fontRef idx="minor">
+            <a:schemeClr val="lt1"/>
+          </a:fontRef>
+        </p:style>
+        <p:txBody>
+          <a:bodyPr rtlCol="0" anchor="ctr"/>
+          <a:lstStyle/>
+          <a:p>
+            <a:pPr algn="ctr"/>
+          </a:p>
+        </p:txBody>
+      </p:sp>
+      <p:pic>
+        <p:nvPicPr>
+          <p:cNvPr id="12" name="Picture 11" descr="bai1_p9_img1.jpeg"/>
+          <p:cNvPicPr>
+            <a:picLocks noChangeAspect="1"/>
+          </p:cNvPicPr>
+          <p:nvPr/>
+        </p:nvPicPr>
+        <p:blipFill>
+          <a:blip r:embed="rId3"/>
+          <a:stretch>
+            <a:fillRect/>
+          </a:stretch>
+        </p:blipFill>
+        <p:spPr>
+          <a:xfrm>
+            <a:off x="731520" y="3611879"/>
+            <a:ext cx="1645920" cy="822959"/>
+          </a:xfrm>
+          <a:prstGeom prst="rect">
+            <a:avLst/>
+          </a:prstGeom>
+        </p:spPr>
+      </p:pic>
+      <p:sp>
+        <p:nvSpPr>
+          <p:cNvPr id="13" name="TextBox 12"/>
+          <p:cNvSpPr txBox="1"/>
+          <p:nvPr/>
+        </p:nvSpPr>
+        <p:spPr>
+          <a:xfrm>
+            <a:off x="2651760" y="3657599"/>
+            <a:ext cx="8897112" cy="731519"/>
+          </a:xfrm>
+          <a:prstGeom prst="rect">
+            <a:avLst/>
+          </a:prstGeom>
+          <a:noFill/>
+        </p:spPr>
+        <p:txBody>
+          <a:bodyPr wrap="square">
+            <a:spAutoFit/>
+          </a:bodyPr>
+          <a:lstStyle/>
+          <a:p>
+            <a:pPr algn="l"/>
+            <a:r>
+              <a:rPr sz="1700" b="0">
+                <a:solidFill>
+                  <a:srgbClr val="0C4A6E"/>
+                </a:solidFill>
+                <a:latin typeface="Arial"/>
+              </a:rPr>
+              <a:t>● Bộ xử lý trung tâm (CPU) xử lý dữ liệu theo chương trình</a:t>
+            </a:r>
+          </a:p>
+        </p:txBody>
+      </p:sp>
+      <p:sp>
+        <p:nvSpPr>
+          <p:cNvPr id="14" name="Rounded Rectangle 13"/>
+          <p:cNvSpPr/>
+          <p:nvPr/>
+        </p:nvSpPr>
+        <p:spPr>
+          <a:xfrm>
+            <a:off x="457200" y="4709159"/>
+            <a:ext cx="11274552" cy="1005839"/>
+          </a:xfrm>
+          <a:prstGeom prst="roundRect">
+            <a:avLst/>
+          </a:prstGeom>
+          <a:solidFill>
+            <a:srgbClr val="FFFFFF"/>
+          </a:solidFill>
+          <a:ln w="12700">
+            <a:solidFill>
+              <a:srgbClr val="D0D5DD"/>
+            </a:solidFill>
+          </a:ln>
+        </p:spPr>
+        <p:style>
+          <a:lnRef idx="1">
+            <a:schemeClr val="accent1"/>
+          </a:lnRef>
+          <a:fillRef idx="3">
+            <a:schemeClr val="accent1"/>
+          </a:fillRef>
+          <a:effectRef idx="2">
+            <a:schemeClr val="accent1"/>
+          </a:effectRef>
+          <a:fontRef idx="minor">
+            <a:schemeClr val="lt1"/>
+          </a:fontRef>
+        </p:style>
+        <p:txBody>
+          <a:bodyPr rtlCol="0" anchor="ctr"/>
+          <a:lstStyle/>
+          <a:p>
+            <a:pPr algn="ctr"/>
+          </a:p>
+        </p:txBody>
+      </p:sp>
+      <p:sp>
+        <p:nvSpPr>
+          <p:cNvPr id="15" name="Rectangle 14"/>
+          <p:cNvSpPr/>
+          <p:nvPr/>
+        </p:nvSpPr>
+        <p:spPr>
+          <a:xfrm>
+            <a:off x="457200" y="4709159"/>
+            <a:ext cx="109728" cy="1005839"/>
+          </a:xfrm>
+          <a:prstGeom prst="rect">
+            <a:avLst/>
+          </a:prstGeom>
+          <a:solidFill>
+            <a:srgbClr val="0EA5E9"/>
+          </a:solidFill>
+          <a:ln>
+            <a:noFill/>
+          </a:ln>
+        </p:spPr>
+        <p:style>
+          <a:lnRef idx="1">
+            <a:schemeClr val="accent1"/>
+          </a:lnRef>
+          <a:fillRef idx="3">
+            <a:schemeClr val="accent1"/>
+          </a:fillRef>
+          <a:effectRef idx="2">
+            <a:schemeClr val="accent1"/>
+          </a:effectRef>
+          <a:fontRef idx="minor">
+            <a:schemeClr val="lt1"/>
+          </a:fontRef>
+        </p:style>
+        <p:txBody>
+          <a:bodyPr rtlCol="0" anchor="ctr"/>
+          <a:lstStyle/>
+          <a:p>
+            <a:pPr algn="ctr"/>
+          </a:p>
+        </p:txBody>
+      </p:sp>
+      <p:pic>
+        <p:nvPicPr>
+          <p:cNvPr id="16" name="Picture 15" descr="bai1_p10_img1.jpeg"/>
+          <p:cNvPicPr>
+            <a:picLocks noChangeAspect="1"/>
+          </p:cNvPicPr>
+          <p:nvPr/>
+        </p:nvPicPr>
+        <p:blipFill>
+          <a:blip r:embed="rId4"/>
+          <a:stretch>
+            <a:fillRect/>
+          </a:stretch>
+        </p:blipFill>
+        <p:spPr>
+          <a:xfrm>
+            <a:off x="731520" y="4800599"/>
+            <a:ext cx="1645920" cy="822959"/>
+          </a:xfrm>
+          <a:prstGeom prst="rect">
+            <a:avLst/>
+          </a:prstGeom>
+        </p:spPr>
+      </p:pic>
+      <p:sp>
+        <p:nvSpPr>
+          <p:cNvPr id="17" name="TextBox 16"/>
+          <p:cNvSpPr txBox="1"/>
+          <p:nvPr/>
+        </p:nvSpPr>
+        <p:spPr>
+          <a:xfrm>
+            <a:off x="2651760" y="4846320"/>
+            <a:ext cx="8897112" cy="731519"/>
+          </a:xfrm>
+          <a:prstGeom prst="rect">
+            <a:avLst/>
+          </a:prstGeom>
+          <a:noFill/>
+        </p:spPr>
+        <p:txBody>
+          <a:bodyPr wrap="square">
+            <a:spAutoFit/>
+          </a:bodyPr>
+          <a:lstStyle/>
+          <a:p>
+            <a:pPr algn="l"/>
+            <a:r>
+              <a:rPr sz="1700" b="0">
+                <a:solidFill>
+                  <a:srgbClr val="0C4A6E"/>
+                </a:solidFill>
+                <a:latin typeface="Arial"/>
+              </a:rPr>
+              <a:t>● Thiết bị Ra (Output) xuất kết quả cho người dùng tiếp nhận</a:t>
+            </a:r>
+          </a:p>
+        </p:txBody>
+      </p:sp>
     </p:spTree>
   </p:cSld>
   <p:clrMapOvr>
     <a:masterClrMapping/>
   </p:clrMapOvr>
   <p:transition spd="med">
-    <p:fade/>
+    <p:wipe/>
   </p:transition>
 </p:sld>
 </file>
@@ -5403,7 +6253,7 @@
                 </a:solidFill>
                 <a:latin typeface="Arial"/>
               </a:rPr>
-              <a:t>Hãy phân loại!</a:t>
+              <a:t>Hãy phân loại thiết bị!</a:t>
             </a:r>
           </a:p>
         </p:txBody>
@@ -5417,7 +6267,7 @@
         <p:spPr>
           <a:xfrm>
             <a:off x="457200" y="2286000"/>
-            <a:ext cx="11274552" cy="822960"/>
+            <a:ext cx="11274552" cy="640080"/>
           </a:xfrm>
           <a:prstGeom prst="rect">
             <a:avLst/>
@@ -5436,13 +6286,13 @@
               </a:spcAft>
             </a:pPr>
             <a:r>
-              <a:rPr sz="1700" b="0">
+              <a:rPr sz="1800" b="0">
                 <a:solidFill>
                   <a:srgbClr val="0C4A6E"/>
                 </a:solidFill>
                 <a:latin typeface="Arial"/>
               </a:rPr>
-              <a:t>Sắp xếp vào đúng nhóm:</a:t>
+              <a:t>Xác định vai trò của từng thiết bị:</a:t>
             </a:r>
           </a:p>
         </p:txBody>
@@ -5455,8 +6305,8 @@
         </p:nvSpPr>
         <p:spPr>
           <a:xfrm>
-            <a:off x="457200" y="3200400"/>
-            <a:ext cx="5545836" cy="548639"/>
+            <a:off x="457200" y="3017520"/>
+            <a:ext cx="5522976" cy="1280159"/>
           </a:xfrm>
           <a:prstGeom prst="roundRect">
             <a:avLst/>
@@ -5492,16 +6342,40 @@
           </a:p>
         </p:txBody>
       </p:sp>
-      <p:sp>
-        <p:nvSpPr>
-          <p:cNvPr id="8" name="TextBox 7"/>
+      <p:pic>
+        <p:nvPicPr>
+          <p:cNvPr id="8" name="Picture 7" descr="bai1_p10_img1.jpeg"/>
+          <p:cNvPicPr>
+            <a:picLocks noChangeAspect="1"/>
+          </p:cNvPicPr>
+          <p:nvPr/>
+        </p:nvPicPr>
+        <p:blipFill>
+          <a:blip r:embed="rId2"/>
+          <a:stretch>
+            <a:fillRect/>
+          </a:stretch>
+        </p:blipFill>
+        <p:spPr>
+          <a:xfrm>
+            <a:off x="640080" y="3154679"/>
+            <a:ext cx="1280160" cy="1005840"/>
+          </a:xfrm>
+          <a:prstGeom prst="rect">
+            <a:avLst/>
+          </a:prstGeom>
+        </p:spPr>
+      </p:pic>
+      <p:sp>
+        <p:nvSpPr>
+          <p:cNvPr id="9" name="TextBox 8"/>
           <p:cNvSpPr txBox="1"/>
           <p:nvPr/>
         </p:nvSpPr>
         <p:spPr>
           <a:xfrm>
-            <a:off x="685800" y="3291840"/>
-            <a:ext cx="5180076" cy="365760"/>
+            <a:off x="2103120" y="3154679"/>
+            <a:ext cx="3785616" cy="1005839"/>
           </a:xfrm>
           <a:prstGeom prst="rect">
             <a:avLst/>
@@ -5516,27 +6390,27 @@
           <a:p>
             <a:pPr algn="l"/>
             <a:r>
-              <a:rPr sz="1500" b="0">
+              <a:rPr sz="1600" b="1">
                 <a:solidFill>
                   <a:srgbClr val="0C4A6E"/>
                 </a:solidFill>
                 <a:latin typeface="Arial"/>
               </a:rPr>
-              <a:t>Bàn phím → Input</a:t>
-            </a:r>
-          </a:p>
-        </p:txBody>
-      </p:sp>
-      <p:sp>
-        <p:nvSpPr>
-          <p:cNvPr id="9" name="Rounded Rectangle 8"/>
+              <a:t>Bàn phím &amp; Chuột ↔ Thiết bị VÀO (Input)</a:t>
+            </a:r>
+          </a:p>
+        </p:txBody>
+      </p:sp>
+      <p:sp>
+        <p:nvSpPr>
+          <p:cNvPr id="10" name="Rounded Rectangle 9"/>
           <p:cNvSpPr/>
           <p:nvPr/>
         </p:nvSpPr>
         <p:spPr>
           <a:xfrm>
-            <a:off x="6185916" y="3200400"/>
-            <a:ext cx="5545836" cy="548639"/>
+            <a:off x="6208776" y="3017520"/>
+            <a:ext cx="5522976" cy="1280159"/>
           </a:xfrm>
           <a:prstGeom prst="roundRect">
             <a:avLst/>
@@ -5572,16 +6446,40 @@
           </a:p>
         </p:txBody>
       </p:sp>
-      <p:sp>
-        <p:nvSpPr>
-          <p:cNvPr id="10" name="TextBox 9"/>
+      <p:pic>
+        <p:nvPicPr>
+          <p:cNvPr id="11" name="Picture 10" descr="bai1_p11_img1.jpeg"/>
+          <p:cNvPicPr>
+            <a:picLocks noChangeAspect="1"/>
+          </p:cNvPicPr>
+          <p:nvPr/>
+        </p:nvPicPr>
+        <p:blipFill>
+          <a:blip r:embed="rId3"/>
+          <a:stretch>
+            <a:fillRect/>
+          </a:stretch>
+        </p:blipFill>
+        <p:spPr>
+          <a:xfrm>
+            <a:off x="6391656" y="3154679"/>
+            <a:ext cx="1280160" cy="1005840"/>
+          </a:xfrm>
+          <a:prstGeom prst="rect">
+            <a:avLst/>
+          </a:prstGeom>
+        </p:spPr>
+      </p:pic>
+      <p:sp>
+        <p:nvSpPr>
+          <p:cNvPr id="12" name="TextBox 11"/>
           <p:cNvSpPr txBox="1"/>
           <p:nvPr/>
         </p:nvSpPr>
         <p:spPr>
           <a:xfrm>
-            <a:off x="6414516" y="3291840"/>
-            <a:ext cx="5180076" cy="365760"/>
+            <a:off x="7854696" y="3154679"/>
+            <a:ext cx="3785616" cy="1005839"/>
           </a:xfrm>
           <a:prstGeom prst="rect">
             <a:avLst/>
@@ -5596,27 +6494,27 @@
           <a:p>
             <a:pPr algn="l"/>
             <a:r>
-              <a:rPr sz="1500" b="0">
+              <a:rPr sz="1600" b="1">
                 <a:solidFill>
                   <a:srgbClr val="0C4A6E"/>
                 </a:solidFill>
                 <a:latin typeface="Arial"/>
               </a:rPr>
-              <a:t>Màn hình → Output</a:t>
-            </a:r>
-          </a:p>
-        </p:txBody>
-      </p:sp>
-      <p:sp>
-        <p:nvSpPr>
-          <p:cNvPr id="11" name="Rounded Rectangle 10"/>
+              <a:t>Màn hình &amp; Máy in ↔ Thiết bị RA (Output)</a:t>
+            </a:r>
+          </a:p>
+        </p:txBody>
+      </p:sp>
+      <p:sp>
+        <p:nvSpPr>
+          <p:cNvPr id="13" name="Rounded Rectangle 12"/>
           <p:cNvSpPr/>
           <p:nvPr/>
         </p:nvSpPr>
         <p:spPr>
           <a:xfrm>
-            <a:off x="457200" y="3886200"/>
-            <a:ext cx="5545836" cy="548639"/>
+            <a:off x="457200" y="4526279"/>
+            <a:ext cx="5522976" cy="1280160"/>
           </a:xfrm>
           <a:prstGeom prst="roundRect">
             <a:avLst/>
@@ -5652,16 +6550,40 @@
           </a:p>
         </p:txBody>
       </p:sp>
-      <p:sp>
-        <p:nvSpPr>
-          <p:cNvPr id="12" name="TextBox 11"/>
+      <p:pic>
+        <p:nvPicPr>
+          <p:cNvPr id="14" name="Picture 13" descr="bai1_p12_img1.jpeg"/>
+          <p:cNvPicPr>
+            <a:picLocks noChangeAspect="1"/>
+          </p:cNvPicPr>
+          <p:nvPr/>
+        </p:nvPicPr>
+        <p:blipFill>
+          <a:blip r:embed="rId4"/>
+          <a:stretch>
+            <a:fillRect/>
+          </a:stretch>
+        </p:blipFill>
+        <p:spPr>
+          <a:xfrm>
+            <a:off x="640080" y="4663440"/>
+            <a:ext cx="1280160" cy="1005839"/>
+          </a:xfrm>
+          <a:prstGeom prst="rect">
+            <a:avLst/>
+          </a:prstGeom>
+        </p:spPr>
+      </p:pic>
+      <p:sp>
+        <p:nvSpPr>
+          <p:cNvPr id="15" name="TextBox 14"/>
           <p:cNvSpPr txBox="1"/>
           <p:nvPr/>
         </p:nvSpPr>
         <p:spPr>
           <a:xfrm>
-            <a:off x="685800" y="3977639"/>
-            <a:ext cx="5180076" cy="365760"/>
+            <a:off x="2103120" y="4663440"/>
+            <a:ext cx="3785616" cy="1005839"/>
           </a:xfrm>
           <a:prstGeom prst="rect">
             <a:avLst/>
@@ -5676,27 +6598,27 @@
           <a:p>
             <a:pPr algn="l"/>
             <a:r>
-              <a:rPr sz="1500" b="0">
+              <a:rPr sz="1600" b="1">
                 <a:solidFill>
                   <a:srgbClr val="0C4A6E"/>
                 </a:solidFill>
                 <a:latin typeface="Arial"/>
               </a:rPr>
-              <a:t>Webcam → Input</a:t>
-            </a:r>
-          </a:p>
-        </p:txBody>
-      </p:sp>
-      <p:sp>
-        <p:nvSpPr>
-          <p:cNvPr id="13" name="Rounded Rectangle 12"/>
+              <a:t>Webcam &amp; Micro ↔ Thiết bị VÀO (Input)</a:t>
+            </a:r>
+          </a:p>
+        </p:txBody>
+      </p:sp>
+      <p:sp>
+        <p:nvSpPr>
+          <p:cNvPr id="16" name="Rounded Rectangle 15"/>
           <p:cNvSpPr/>
           <p:nvPr/>
         </p:nvSpPr>
         <p:spPr>
           <a:xfrm>
-            <a:off x="6185916" y="3886200"/>
-            <a:ext cx="5545836" cy="548639"/>
+            <a:off x="6208776" y="4526279"/>
+            <a:ext cx="5522976" cy="1280160"/>
           </a:xfrm>
           <a:prstGeom prst="roundRect">
             <a:avLst/>
@@ -5732,16 +6654,40 @@
           </a:p>
         </p:txBody>
       </p:sp>
-      <p:sp>
-        <p:nvSpPr>
-          <p:cNvPr id="14" name="TextBox 13"/>
+      <p:pic>
+        <p:nvPicPr>
+          <p:cNvPr id="17" name="Picture 16" descr="bai1_p13_img1.jpeg"/>
+          <p:cNvPicPr>
+            <a:picLocks noChangeAspect="1"/>
+          </p:cNvPicPr>
+          <p:nvPr/>
+        </p:nvPicPr>
+        <p:blipFill>
+          <a:blip r:embed="rId5"/>
+          <a:stretch>
+            <a:fillRect/>
+          </a:stretch>
+        </p:blipFill>
+        <p:spPr>
+          <a:xfrm>
+            <a:off x="6391656" y="4663440"/>
+            <a:ext cx="1280160" cy="1005839"/>
+          </a:xfrm>
+          <a:prstGeom prst="rect">
+            <a:avLst/>
+          </a:prstGeom>
+        </p:spPr>
+      </p:pic>
+      <p:sp>
+        <p:nvSpPr>
+          <p:cNvPr id="18" name="TextBox 17"/>
           <p:cNvSpPr txBox="1"/>
           <p:nvPr/>
         </p:nvSpPr>
         <p:spPr>
           <a:xfrm>
-            <a:off x="6414516" y="3977639"/>
-            <a:ext cx="5180076" cy="365760"/>
+            <a:off x="7854696" y="4663440"/>
+            <a:ext cx="3785616" cy="1005839"/>
           </a:xfrm>
           <a:prstGeom prst="rect">
             <a:avLst/>
@@ -5756,93 +6702,13 @@
           <a:p>
             <a:pPr algn="l"/>
             <a:r>
-              <a:rPr sz="1500" b="0">
+              <a:rPr sz="1600" b="1">
                 <a:solidFill>
                   <a:srgbClr val="0C4A6E"/>
                 </a:solidFill>
                 <a:latin typeface="Arial"/>
               </a:rPr>
-              <a:t>Loa → Output</a:t>
-            </a:r>
-          </a:p>
-        </p:txBody>
-      </p:sp>
-      <p:sp>
-        <p:nvSpPr>
-          <p:cNvPr id="15" name="Rounded Rectangle 14"/>
-          <p:cNvSpPr/>
-          <p:nvPr/>
-        </p:nvSpPr>
-        <p:spPr>
-          <a:xfrm>
-            <a:off x="457200" y="4572000"/>
-            <a:ext cx="5545836" cy="548639"/>
-          </a:xfrm>
-          <a:prstGeom prst="roundRect">
-            <a:avLst/>
-          </a:prstGeom>
-          <a:solidFill>
-            <a:srgbClr val="FFFFFF"/>
-          </a:solidFill>
-          <a:ln w="12700">
-            <a:solidFill>
-              <a:srgbClr val="0EA5E9"/>
-            </a:solidFill>
-          </a:ln>
-        </p:spPr>
-        <p:style>
-          <a:lnRef idx="1">
-            <a:schemeClr val="accent1"/>
-          </a:lnRef>
-          <a:fillRef idx="3">
-            <a:schemeClr val="accent1"/>
-          </a:fillRef>
-          <a:effectRef idx="2">
-            <a:schemeClr val="accent1"/>
-          </a:effectRef>
-          <a:fontRef idx="minor">
-            <a:schemeClr val="lt1"/>
-          </a:fontRef>
-        </p:style>
-        <p:txBody>
-          <a:bodyPr rtlCol="0" anchor="ctr"/>
-          <a:lstStyle/>
-          <a:p>
-            <a:pPr algn="ctr"/>
-          </a:p>
-        </p:txBody>
-      </p:sp>
-      <p:sp>
-        <p:nvSpPr>
-          <p:cNvPr id="16" name="TextBox 15"/>
-          <p:cNvSpPr txBox="1"/>
-          <p:nvPr/>
-        </p:nvSpPr>
-        <p:spPr>
-          <a:xfrm>
-            <a:off x="685800" y="4663440"/>
-            <a:ext cx="5180076" cy="365760"/>
-          </a:xfrm>
-          <a:prstGeom prst="rect">
-            <a:avLst/>
-          </a:prstGeom>
-          <a:noFill/>
-        </p:spPr>
-        <p:txBody>
-          <a:bodyPr wrap="square">
-            <a:spAutoFit/>
-          </a:bodyPr>
-          <a:lstStyle/>
-          <a:p>
-            <a:pPr algn="l"/>
-            <a:r>
-              <a:rPr sz="1500" b="0">
-                <a:solidFill>
-                  <a:srgbClr val="0C4A6E"/>
-                </a:solidFill>
-                <a:latin typeface="Arial"/>
-              </a:rPr>
-              <a:t>Màn hình cảm ứng → Cả hai!</a:t>
+              <a:t>Màn hình cảm ứng ↔ Vừa VÀO vừa RA</a:t>
             </a:r>
           </a:p>
         </p:txBody>
@@ -5852,6 +6718,396 @@
   <p:clrMapOvr>
     <a:masterClrMapping/>
   </p:clrMapOvr>
+  <p:timing>
+    <p:tnLst>
+      <p:par>
+        <p:cTn id="1" dur="indefinite" restart="never" nodeType="tmRoot">
+          <p:childTnLst>
+            <p:seq concurrent="1" nextAc="seek">
+              <p:cTn id="2" dur="indefinite" nodeType="mainSeq">
+                <p:childTnLst>
+                  <p:par>
+                    <p:cTn id="3" fill="hold">
+                      <p:stCondLst>
+                        <p:cond delay="0"/>
+                      </p:stCondLst>
+                      <p:childTnLst>
+                        <p:par>
+                          <p:cTn id="4" presetID="1" presetClass="entr" presetSubtype="0" fill="hold">
+                            <p:stCondLst>
+                              <p:cond delay="0"/>
+                            </p:stCondLst>
+                            <p:childTnLst>
+                              <p:set>
+                                <p:cBhvr>
+                                  <p:cTn id="5" dur="1" fill="hold">
+                                    <p:stCondLst>
+                                      <p:cond delay="0"/>
+                                    </p:stCondLst>
+                                  </p:cTn>
+                                  <p:tgtEl>
+                                    <p:spTgt spid="7"/>
+                                  </p:tgtEl>
+                                  <p:attrNameLst>
+                                    <p:attrName>style.visibility</p:attrName>
+                                  </p:attrNameLst>
+                                </p:cBhvr>
+                                <p:to>
+                                  <p:strVal val="visible"/>
+                                </p:to>
+                              </p:set>
+                            </p:childTnLst>
+                          </p:cTn>
+                        </p:par>
+                        <p:par>
+                          <p:cTn id="6" presetID="1" presetClass="entr" presetSubtype="0" fill="hold">
+                            <p:stCondLst>
+                              <p:cond delay="0"/>
+                            </p:stCondLst>
+                            <p:childTnLst>
+                              <p:set>
+                                <p:cBhvr>
+                                  <p:cTn id="7" dur="1" fill="hold">
+                                    <p:stCondLst>
+                                      <p:cond delay="0"/>
+                                    </p:stCondLst>
+                                  </p:cTn>
+                                  <p:tgtEl>
+                                    <p:spTgt spid="8"/>
+                                  </p:tgtEl>
+                                  <p:attrNameLst>
+                                    <p:attrName>style.visibility</p:attrName>
+                                  </p:attrNameLst>
+                                </p:cBhvr>
+                                <p:to>
+                                  <p:strVal val="visible"/>
+                                </p:to>
+                              </p:set>
+                            </p:childTnLst>
+                          </p:cTn>
+                        </p:par>
+                        <p:par>
+                          <p:cTn id="8" presetID="1" presetClass="entr" presetSubtype="0" fill="hold">
+                            <p:stCondLst>
+                              <p:cond delay="0"/>
+                            </p:stCondLst>
+                            <p:childTnLst>
+                              <p:set>
+                                <p:cBhvr>
+                                  <p:cTn id="9" dur="1" fill="hold">
+                                    <p:stCondLst>
+                                      <p:cond delay="0"/>
+                                    </p:stCondLst>
+                                  </p:cTn>
+                                  <p:tgtEl>
+                                    <p:spTgt spid="9"/>
+                                  </p:tgtEl>
+                                  <p:attrNameLst>
+                                    <p:attrName>style.visibility</p:attrName>
+                                  </p:attrNameLst>
+                                </p:cBhvr>
+                                <p:to>
+                                  <p:strVal val="visible"/>
+                                </p:to>
+                              </p:set>
+                            </p:childTnLst>
+                          </p:cTn>
+                        </p:par>
+                      </p:childTnLst>
+                    </p:cTn>
+                  </p:par>
+                  <p:par>
+                    <p:cTn id="10" fill="hold">
+                      <p:stCondLst>
+                        <p:cond delay="0"/>
+                      </p:stCondLst>
+                      <p:childTnLst>
+                        <p:par>
+                          <p:cTn id="11" presetID="1" presetClass="entr" presetSubtype="0" fill="hold">
+                            <p:stCondLst>
+                              <p:cond delay="0"/>
+                            </p:stCondLst>
+                            <p:childTnLst>
+                              <p:set>
+                                <p:cBhvr>
+                                  <p:cTn id="12" dur="1" fill="hold">
+                                    <p:stCondLst>
+                                      <p:cond delay="0"/>
+                                    </p:stCondLst>
+                                  </p:cTn>
+                                  <p:tgtEl>
+                                    <p:spTgt spid="10"/>
+                                  </p:tgtEl>
+                                  <p:attrNameLst>
+                                    <p:attrName>style.visibility</p:attrName>
+                                  </p:attrNameLst>
+                                </p:cBhvr>
+                                <p:to>
+                                  <p:strVal val="visible"/>
+                                </p:to>
+                              </p:set>
+                            </p:childTnLst>
+                          </p:cTn>
+                        </p:par>
+                        <p:par>
+                          <p:cTn id="13" presetID="1" presetClass="entr" presetSubtype="0" fill="hold">
+                            <p:stCondLst>
+                              <p:cond delay="0"/>
+                            </p:stCondLst>
+                            <p:childTnLst>
+                              <p:set>
+                                <p:cBhvr>
+                                  <p:cTn id="14" dur="1" fill="hold">
+                                    <p:stCondLst>
+                                      <p:cond delay="0"/>
+                                    </p:stCondLst>
+                                  </p:cTn>
+                                  <p:tgtEl>
+                                    <p:spTgt spid="11"/>
+                                  </p:tgtEl>
+                                  <p:attrNameLst>
+                                    <p:attrName>style.visibility</p:attrName>
+                                  </p:attrNameLst>
+                                </p:cBhvr>
+                                <p:to>
+                                  <p:strVal val="visible"/>
+                                </p:to>
+                              </p:set>
+                            </p:childTnLst>
+                          </p:cTn>
+                        </p:par>
+                        <p:par>
+                          <p:cTn id="15" presetID="1" presetClass="entr" presetSubtype="0" fill="hold">
+                            <p:stCondLst>
+                              <p:cond delay="0"/>
+                            </p:stCondLst>
+                            <p:childTnLst>
+                              <p:set>
+                                <p:cBhvr>
+                                  <p:cTn id="16" dur="1" fill="hold">
+                                    <p:stCondLst>
+                                      <p:cond delay="0"/>
+                                    </p:stCondLst>
+                                  </p:cTn>
+                                  <p:tgtEl>
+                                    <p:spTgt spid="12"/>
+                                  </p:tgtEl>
+                                  <p:attrNameLst>
+                                    <p:attrName>style.visibility</p:attrName>
+                                  </p:attrNameLst>
+                                </p:cBhvr>
+                                <p:to>
+                                  <p:strVal val="visible"/>
+                                </p:to>
+                              </p:set>
+                            </p:childTnLst>
+                          </p:cTn>
+                        </p:par>
+                      </p:childTnLst>
+                    </p:cTn>
+                  </p:par>
+                  <p:par>
+                    <p:cTn id="17" fill="hold">
+                      <p:stCondLst>
+                        <p:cond delay="0"/>
+                      </p:stCondLst>
+                      <p:childTnLst>
+                        <p:par>
+                          <p:cTn id="18" presetID="1" presetClass="entr" presetSubtype="0" fill="hold">
+                            <p:stCondLst>
+                              <p:cond delay="0"/>
+                            </p:stCondLst>
+                            <p:childTnLst>
+                              <p:set>
+                                <p:cBhvr>
+                                  <p:cTn id="19" dur="1" fill="hold">
+                                    <p:stCondLst>
+                                      <p:cond delay="0"/>
+                                    </p:stCondLst>
+                                  </p:cTn>
+                                  <p:tgtEl>
+                                    <p:spTgt spid="13"/>
+                                  </p:tgtEl>
+                                  <p:attrNameLst>
+                                    <p:attrName>style.visibility</p:attrName>
+                                  </p:attrNameLst>
+                                </p:cBhvr>
+                                <p:to>
+                                  <p:strVal val="visible"/>
+                                </p:to>
+                              </p:set>
+                            </p:childTnLst>
+                          </p:cTn>
+                        </p:par>
+                        <p:par>
+                          <p:cTn id="20" presetID="1" presetClass="entr" presetSubtype="0" fill="hold">
+                            <p:stCondLst>
+                              <p:cond delay="0"/>
+                            </p:stCondLst>
+                            <p:childTnLst>
+                              <p:set>
+                                <p:cBhvr>
+                                  <p:cTn id="21" dur="1" fill="hold">
+                                    <p:stCondLst>
+                                      <p:cond delay="0"/>
+                                    </p:stCondLst>
+                                  </p:cTn>
+                                  <p:tgtEl>
+                                    <p:spTgt spid="14"/>
+                                  </p:tgtEl>
+                                  <p:attrNameLst>
+                                    <p:attrName>style.visibility</p:attrName>
+                                  </p:attrNameLst>
+                                </p:cBhvr>
+                                <p:to>
+                                  <p:strVal val="visible"/>
+                                </p:to>
+                              </p:set>
+                            </p:childTnLst>
+                          </p:cTn>
+                        </p:par>
+                        <p:par>
+                          <p:cTn id="22" presetID="1" presetClass="entr" presetSubtype="0" fill="hold">
+                            <p:stCondLst>
+                              <p:cond delay="0"/>
+                            </p:stCondLst>
+                            <p:childTnLst>
+                              <p:set>
+                                <p:cBhvr>
+                                  <p:cTn id="23" dur="1" fill="hold">
+                                    <p:stCondLst>
+                                      <p:cond delay="0"/>
+                                    </p:stCondLst>
+                                  </p:cTn>
+                                  <p:tgtEl>
+                                    <p:spTgt spid="15"/>
+                                  </p:tgtEl>
+                                  <p:attrNameLst>
+                                    <p:attrName>style.visibility</p:attrName>
+                                  </p:attrNameLst>
+                                </p:cBhvr>
+                                <p:to>
+                                  <p:strVal val="visible"/>
+                                </p:to>
+                              </p:set>
+                            </p:childTnLst>
+                          </p:cTn>
+                        </p:par>
+                      </p:childTnLst>
+                    </p:cTn>
+                  </p:par>
+                  <p:par>
+                    <p:cTn id="24" fill="hold">
+                      <p:stCondLst>
+                        <p:cond delay="0"/>
+                      </p:stCondLst>
+                      <p:childTnLst>
+                        <p:par>
+                          <p:cTn id="25" presetID="1" presetClass="entr" presetSubtype="0" fill="hold">
+                            <p:stCondLst>
+                              <p:cond delay="0"/>
+                            </p:stCondLst>
+                            <p:childTnLst>
+                              <p:set>
+                                <p:cBhvr>
+                                  <p:cTn id="26" dur="1" fill="hold">
+                                    <p:stCondLst>
+                                      <p:cond delay="0"/>
+                                    </p:stCondLst>
+                                  </p:cTn>
+                                  <p:tgtEl>
+                                    <p:spTgt spid="16"/>
+                                  </p:tgtEl>
+                                  <p:attrNameLst>
+                                    <p:attrName>style.visibility</p:attrName>
+                                  </p:attrNameLst>
+                                </p:cBhvr>
+                                <p:to>
+                                  <p:strVal val="visible"/>
+                                </p:to>
+                              </p:set>
+                            </p:childTnLst>
+                          </p:cTn>
+                        </p:par>
+                        <p:par>
+                          <p:cTn id="27" presetID="1" presetClass="entr" presetSubtype="0" fill="hold">
+                            <p:stCondLst>
+                              <p:cond delay="0"/>
+                            </p:stCondLst>
+                            <p:childTnLst>
+                              <p:set>
+                                <p:cBhvr>
+                                  <p:cTn id="28" dur="1" fill="hold">
+                                    <p:stCondLst>
+                                      <p:cond delay="0"/>
+                                    </p:stCondLst>
+                                  </p:cTn>
+                                  <p:tgtEl>
+                                    <p:spTgt spid="17"/>
+                                  </p:tgtEl>
+                                  <p:attrNameLst>
+                                    <p:attrName>style.visibility</p:attrName>
+                                  </p:attrNameLst>
+                                </p:cBhvr>
+                                <p:to>
+                                  <p:strVal val="visible"/>
+                                </p:to>
+                              </p:set>
+                            </p:childTnLst>
+                          </p:cTn>
+                        </p:par>
+                        <p:par>
+                          <p:cTn id="29" presetID="1" presetClass="entr" presetSubtype="0" fill="hold">
+                            <p:stCondLst>
+                              <p:cond delay="0"/>
+                            </p:stCondLst>
+                            <p:childTnLst>
+                              <p:set>
+                                <p:cBhvr>
+                                  <p:cTn id="30" dur="1" fill="hold">
+                                    <p:stCondLst>
+                                      <p:cond delay="0"/>
+                                    </p:stCondLst>
+                                  </p:cTn>
+                                  <p:tgtEl>
+                                    <p:spTgt spid="18"/>
+                                  </p:tgtEl>
+                                  <p:attrNameLst>
+                                    <p:attrName>style.visibility</p:attrName>
+                                  </p:attrNameLst>
+                                </p:cBhvr>
+                                <p:to>
+                                  <p:strVal val="visible"/>
+                                </p:to>
+                              </p:set>
+                            </p:childTnLst>
+                          </p:cTn>
+                        </p:par>
+                      </p:childTnLst>
+                    </p:cTn>
+                  </p:par>
+                </p:childTnLst>
+              </p:cTn>
+              <p:prevCondLst>
+                <p:cond evt="onPrev" delay="0">
+                  <p:tgtEl>
+                    <p:sldTgt/>
+                  </p:tgtEl>
+                </p:cond>
+              </p:prevCondLst>
+              <p:nextCondLst>
+                <p:cond evt="onNext" delay="0">
+                  <p:tgtEl>
+                    <p:sldTgt/>
+                  </p:tgtEl>
+                </p:cond>
+              </p:nextCondLst>
+            </p:seq>
+          </p:childTnLst>
+        </p:cTn>
+      </p:par>
+    </p:tnLst>
+  </p:timing>
   <p:transition spd="med">
     <p:wipe/>
   </p:transition>
@@ -5984,7 +7240,7 @@
                 </a:solidFill>
                 <a:latin typeface="Arial"/>
               </a:rPr>
-              <a:t>  LỚP 7 • LUYỆN TẬP</a:t>
+              <a:t>  LỚP 7 • THỬ THÁCH</a:t>
             </a:r>
           </a:p>
         </p:txBody>
@@ -6019,21 +7275,107 @@
                 </a:solidFill>
                 <a:latin typeface="Arial"/>
               </a:rPr>
-              <a:t>Thảo luận nhóm</a:t>
-            </a:r>
-          </a:p>
-        </p:txBody>
-      </p:sp>
-      <p:sp>
-        <p:nvSpPr>
-          <p:cNvPr id="6" name="TextBox 5"/>
+              <a:t>Thảo luận chuyên sâu</a:t>
+            </a:r>
+          </a:p>
+        </p:txBody>
+      </p:sp>
+      <p:sp>
+        <p:nvSpPr>
+          <p:cNvPr id="6" name="Rounded Rectangle 5"/>
+          <p:cNvSpPr/>
+          <p:nvPr/>
+        </p:nvSpPr>
+        <p:spPr>
+          <a:xfrm>
+            <a:off x="365760" y="2286000"/>
+            <a:ext cx="6400800" cy="3383279"/>
+          </a:xfrm>
+          <a:prstGeom prst="roundRect">
+            <a:avLst/>
+          </a:prstGeom>
+          <a:solidFill>
+            <a:srgbClr val="FFFFFF"/>
+          </a:solidFill>
+          <a:ln>
+            <a:noFill/>
+          </a:ln>
+        </p:spPr>
+        <p:style>
+          <a:lnRef idx="1">
+            <a:schemeClr val="accent1"/>
+          </a:lnRef>
+          <a:fillRef idx="3">
+            <a:schemeClr val="accent1"/>
+          </a:fillRef>
+          <a:effectRef idx="2">
+            <a:schemeClr val="accent1"/>
+          </a:effectRef>
+          <a:fontRef idx="minor">
+            <a:schemeClr val="lt1"/>
+          </a:fontRef>
+        </p:style>
+        <p:txBody>
+          <a:bodyPr rtlCol="0" anchor="ctr"/>
+          <a:lstStyle/>
+          <a:p>
+            <a:pPr algn="ctr"/>
+          </a:p>
+        </p:txBody>
+      </p:sp>
+      <p:sp>
+        <p:nvSpPr>
+          <p:cNvPr id="7" name="Rectangle 6"/>
+          <p:cNvSpPr/>
+          <p:nvPr/>
+        </p:nvSpPr>
+        <p:spPr>
+          <a:xfrm>
+            <a:off x="365760" y="2286000"/>
+            <a:ext cx="109728" cy="3383279"/>
+          </a:xfrm>
+          <a:prstGeom prst="rect">
+            <a:avLst/>
+          </a:prstGeom>
+          <a:solidFill>
+            <a:srgbClr val="0EA5E9"/>
+          </a:solidFill>
+          <a:ln>
+            <a:noFill/>
+          </a:ln>
+        </p:spPr>
+        <p:style>
+          <a:lnRef idx="1">
+            <a:schemeClr val="accent1"/>
+          </a:lnRef>
+          <a:fillRef idx="3">
+            <a:schemeClr val="accent1"/>
+          </a:fillRef>
+          <a:effectRef idx="2">
+            <a:schemeClr val="accent1"/>
+          </a:effectRef>
+          <a:fontRef idx="minor">
+            <a:schemeClr val="lt1"/>
+          </a:fontRef>
+        </p:style>
+        <p:txBody>
+          <a:bodyPr rtlCol="0" anchor="ctr"/>
+          <a:lstStyle/>
+          <a:p>
+            <a:pPr algn="ctr"/>
+          </a:p>
+        </p:txBody>
+      </p:sp>
+      <p:sp>
+        <p:nvSpPr>
+          <p:cNvPr id="8" name="TextBox 7"/>
           <p:cNvSpPr txBox="1"/>
           <p:nvPr/>
         </p:nvSpPr>
         <p:spPr>
           <a:xfrm>
-            <a:off x="457200" y="2286000"/>
-            <a:ext cx="11274552" cy="822960"/>
+            <a:off x="731520" y="2468880"/>
+            <a:ext cx="5852160" cy="3017520"/>
           </a:xfrm>
           <a:prstGeom prst="rect">
             <a:avLst/>
@@ -6052,120 +7394,48 @@
               </a:spcAft>
             </a:pPr>
             <a:r>
-              <a:rPr sz="1700" b="0">
+              <a:rPr sz="2000" b="0">
                 <a:solidFill>
                   <a:srgbClr val="0C4A6E"/>
                 </a:solidFill>
                 <a:latin typeface="Arial"/>
               </a:rPr>
-              <a:t>Nhóm 4 em, trả lời:</a:t>
-            </a:r>
-          </a:p>
-          <a:p>
-            <a:pPr algn="l">
-              <a:spcAft>
-                <a:spcPts val="600"/>
-              </a:spcAft>
-            </a:pPr>
-            <a:r>
-              <a:rPr sz="1700" b="0">
-                <a:solidFill>
-                  <a:srgbClr val="0C4A6E"/>
-                </a:solidFill>
-                <a:latin typeface="Arial"/>
-              </a:rPr>
-              <a:t/>
-            </a:r>
-          </a:p>
-          <a:p>
-            <a:pPr algn="l">
-              <a:spcAft>
-                <a:spcPts val="600"/>
-              </a:spcAft>
-            </a:pPr>
-            <a:r>
-              <a:rPr sz="1700" b="0">
-                <a:solidFill>
-                  <a:srgbClr val="0C4A6E"/>
-                </a:solidFill>
-                <a:latin typeface="Arial"/>
-              </a:rPr>
-              <a:t>1. Nếu máy tính không có thiết bị vào,</a:t>
-            </a:r>
-          </a:p>
-          <a:p>
-            <a:pPr algn="l">
-              <a:spcAft>
-                <a:spcPts val="600"/>
-              </a:spcAft>
-            </a:pPr>
-            <a:r>
-              <a:rPr sz="1700" b="0">
-                <a:solidFill>
-                  <a:srgbClr val="0C4A6E"/>
-                </a:solidFill>
-                <a:latin typeface="Arial"/>
-              </a:rPr>
-              <a:t>   em có thể làm gì với nó?</a:t>
-            </a:r>
-          </a:p>
-          <a:p>
-            <a:pPr algn="l">
-              <a:spcAft>
-                <a:spcPts val="600"/>
-              </a:spcAft>
-            </a:pPr>
-            <a:r>
-              <a:rPr sz="1700" b="0">
-                <a:solidFill>
-                  <a:srgbClr val="0C4A6E"/>
-                </a:solidFill>
-                <a:latin typeface="Arial"/>
-              </a:rPr>
-              <a:t>2. Kể 3 thiết bị vào-ra mà smartphone có.</a:t>
-            </a:r>
-          </a:p>
-          <a:p>
-            <a:pPr algn="l">
-              <a:spcAft>
-                <a:spcPts val="600"/>
-              </a:spcAft>
-            </a:pPr>
-            <a:r>
-              <a:rPr sz="1700" b="0">
-                <a:solidFill>
-                  <a:srgbClr val="0C4A6E"/>
-                </a:solidFill>
-                <a:latin typeface="Arial"/>
-              </a:rPr>
-              <a:t/>
-            </a:r>
-          </a:p>
-          <a:p>
-            <a:pPr algn="l">
-              <a:spcAft>
-                <a:spcPts val="600"/>
-              </a:spcAft>
-            </a:pPr>
-            <a:r>
-              <a:rPr sz="1700" b="0">
-                <a:solidFill>
-                  <a:srgbClr val="0C4A6E"/>
-                </a:solidFill>
-                <a:latin typeface="Arial"/>
-              </a:rPr>
-              <a:t>5 phút thảo luận + 2 phút trình bày</a:t>
-            </a:r>
-          </a:p>
-        </p:txBody>
-      </p:sp>
+              <a:t>Trả lời các câu hỏi tình huống (5 phút):</a:t>
+            </a:r>
+          </a:p>
+        </p:txBody>
+      </p:sp>
+      <p:pic>
+        <p:nvPicPr>
+          <p:cNvPr id="9" name="Picture 8" descr="bai1_p10_img1.jpeg"/>
+          <p:cNvPicPr>
+            <a:picLocks noChangeAspect="1"/>
+          </p:cNvPicPr>
+          <p:nvPr/>
+        </p:nvPicPr>
+        <p:blipFill>
+          <a:blip r:embed="rId2"/>
+          <a:stretch>
+            <a:fillRect/>
+          </a:stretch>
+        </p:blipFill>
+        <p:spPr>
+          <a:xfrm>
+            <a:off x="7132320" y="2377440"/>
+            <a:ext cx="4572000" cy="3200399"/>
+          </a:xfrm>
+          <a:prstGeom prst="rect">
+            <a:avLst/>
+          </a:prstGeom>
+        </p:spPr>
+      </p:pic>
     </p:spTree>
   </p:cSld>
   <p:clrMapOvr>
     <a:masterClrMapping/>
   </p:clrMapOvr>
   <p:transition spd="med">
-    <p:wipe/>
+    <p:cover/>
   </p:transition>
 </p:sld>
 </file>
@@ -6481,8 +7751,8 @@
         </p:nvSpPr>
         <p:spPr>
           <a:xfrm>
-            <a:off x="1371600" y="2377440"/>
-            <a:ext cx="9445752" cy="457200"/>
+            <a:off x="1371600" y="2423160"/>
+            <a:ext cx="9445752" cy="365760"/>
           </a:xfrm>
           <a:prstGeom prst="rect">
             <a:avLst/>
@@ -6503,7 +7773,7 @@
                 </a:solidFill>
                 <a:latin typeface="Arial"/>
               </a:rPr>
-              <a:t>Thiết bị vào (Input): đưa thông tin vào máy</a:t>
+              <a:t>Thiết bị vào (Input): nhập dữ liệu vào máy tính</a:t>
             </a:r>
           </a:p>
         </p:txBody>
@@ -6516,8 +7786,8 @@
         </p:nvSpPr>
         <p:spPr>
           <a:xfrm>
-            <a:off x="914400" y="3200400"/>
-            <a:ext cx="73152" cy="640080"/>
+            <a:off x="914400" y="3291840"/>
+            <a:ext cx="73152" cy="640079"/>
           </a:xfrm>
           <a:prstGeom prst="rect">
             <a:avLst/>
@@ -6559,8 +7829,8 @@
         </p:nvSpPr>
         <p:spPr>
           <a:xfrm>
-            <a:off x="1097280" y="3200400"/>
-            <a:ext cx="9994392" cy="640080"/>
+            <a:off x="1097280" y="3291840"/>
+            <a:ext cx="9994392" cy="640079"/>
           </a:xfrm>
           <a:prstGeom prst="roundRect">
             <a:avLst/>
@@ -6602,8 +7872,8 @@
         </p:nvSpPr>
         <p:spPr>
           <a:xfrm>
-            <a:off x="1371600" y="3291840"/>
-            <a:ext cx="9445752" cy="457200"/>
+            <a:off x="1371600" y="3429000"/>
+            <a:ext cx="9445752" cy="365760"/>
           </a:xfrm>
           <a:prstGeom prst="rect">
             <a:avLst/>
@@ -6624,7 +7894,7 @@
                 </a:solidFill>
                 <a:latin typeface="Arial"/>
               </a:rPr>
-              <a:t>Thiết bị ra (Output): đưa thông tin ra ngoài</a:t>
+              <a:t>Thiết bị ra (Output): xuất kết quả từ máy tính</a:t>
             </a:r>
           </a:p>
         </p:txBody>
@@ -6637,7 +7907,7 @@
         </p:nvSpPr>
         <p:spPr>
           <a:xfrm>
-            <a:off x="914400" y="4114800"/>
+            <a:off x="914400" y="4297680"/>
             <a:ext cx="73152" cy="640080"/>
           </a:xfrm>
           <a:prstGeom prst="rect">
@@ -6680,7 +7950,7 @@
         </p:nvSpPr>
         <p:spPr>
           <a:xfrm>
-            <a:off x="1097280" y="4114800"/>
+            <a:off x="1097280" y="4297680"/>
             <a:ext cx="9994392" cy="640080"/>
           </a:xfrm>
           <a:prstGeom prst="roundRect">
@@ -6723,8 +7993,8 @@
         </p:nvSpPr>
         <p:spPr>
           <a:xfrm>
-            <a:off x="1371600" y="4206240"/>
-            <a:ext cx="9445752" cy="457200"/>
+            <a:off x="1371600" y="4434840"/>
+            <a:ext cx="9445752" cy="365760"/>
           </a:xfrm>
           <a:prstGeom prst="rect">
             <a:avLst/>
@@ -6745,128 +8015,7 @@
                 </a:solidFill>
                 <a:latin typeface="Arial"/>
               </a:rPr>
-              <a:t>Quy trình: Input → Xử lý → Output</a:t>
-            </a:r>
-          </a:p>
-        </p:txBody>
-      </p:sp>
-      <p:sp>
-        <p:nvSpPr>
-          <p:cNvPr id="16" name="Rectangle 15"/>
-          <p:cNvSpPr/>
-          <p:nvPr/>
-        </p:nvSpPr>
-        <p:spPr>
-          <a:xfrm>
-            <a:off x="914400" y="5029200"/>
-            <a:ext cx="73152" cy="640080"/>
-          </a:xfrm>
-          <a:prstGeom prst="rect">
-            <a:avLst/>
-          </a:prstGeom>
-          <a:solidFill>
-            <a:srgbClr val="0EA5E9"/>
-          </a:solidFill>
-          <a:ln>
-            <a:noFill/>
-          </a:ln>
-        </p:spPr>
-        <p:style>
-          <a:lnRef idx="1">
-            <a:schemeClr val="accent1"/>
-          </a:lnRef>
-          <a:fillRef idx="3">
-            <a:schemeClr val="accent1"/>
-          </a:fillRef>
-          <a:effectRef idx="2">
-            <a:schemeClr val="accent1"/>
-          </a:effectRef>
-          <a:fontRef idx="minor">
-            <a:schemeClr val="lt1"/>
-          </a:fontRef>
-        </p:style>
-        <p:txBody>
-          <a:bodyPr rtlCol="0" anchor="ctr"/>
-          <a:lstStyle/>
-          <a:p>
-            <a:pPr algn="ctr"/>
-          </a:p>
-        </p:txBody>
-      </p:sp>
-      <p:sp>
-        <p:nvSpPr>
-          <p:cNvPr id="17" name="Rounded Rectangle 16"/>
-          <p:cNvSpPr/>
-          <p:nvPr/>
-        </p:nvSpPr>
-        <p:spPr>
-          <a:xfrm>
-            <a:off x="1097280" y="5029200"/>
-            <a:ext cx="9994392" cy="640080"/>
-          </a:xfrm>
-          <a:prstGeom prst="roundRect">
-            <a:avLst/>
-          </a:prstGeom>
-          <a:solidFill>
-            <a:srgbClr val="F0F9FF"/>
-          </a:solidFill>
-          <a:ln>
-            <a:noFill/>
-          </a:ln>
-        </p:spPr>
-        <p:style>
-          <a:lnRef idx="1">
-            <a:schemeClr val="accent1"/>
-          </a:lnRef>
-          <a:fillRef idx="3">
-            <a:schemeClr val="accent1"/>
-          </a:fillRef>
-          <a:effectRef idx="2">
-            <a:schemeClr val="accent1"/>
-          </a:effectRef>
-          <a:fontRef idx="minor">
-            <a:schemeClr val="lt1"/>
-          </a:fontRef>
-        </p:style>
-        <p:txBody>
-          <a:bodyPr rtlCol="0" anchor="ctr"/>
-          <a:lstStyle/>
-          <a:p>
-            <a:pPr algn="ctr"/>
-          </a:p>
-        </p:txBody>
-      </p:sp>
-      <p:sp>
-        <p:nvSpPr>
-          <p:cNvPr id="18" name="TextBox 17"/>
-          <p:cNvSpPr txBox="1"/>
-          <p:nvPr/>
-        </p:nvSpPr>
-        <p:spPr>
-          <a:xfrm>
-            <a:off x="1371600" y="5120640"/>
-            <a:ext cx="9445752" cy="457200"/>
-          </a:xfrm>
-          <a:prstGeom prst="rect">
-            <a:avLst/>
-          </a:prstGeom>
-          <a:noFill/>
-        </p:spPr>
-        <p:txBody>
-          <a:bodyPr wrap="square">
-            <a:spAutoFit/>
-          </a:bodyPr>
-          <a:lstStyle/>
-          <a:p>
-            <a:pPr algn="l"/>
-            <a:r>
-              <a:rPr sz="1800" b="0">
-                <a:solidFill>
-                  <a:srgbClr val="0C4A6E"/>
-                </a:solidFill>
-                <a:latin typeface="Arial"/>
-              </a:rPr>
-              <a:t>Có thiết bị vừa vào vừa ra (I/O)</a:t>
+              <a:t>Quy trình xử lý: Input -&gt; Processing -&gt; Output</a:t>
             </a:r>
           </a:p>
         </p:txBody>
@@ -6943,7 +8092,7 @@
         </p:nvSpPr>
         <p:spPr>
           <a:xfrm>
-            <a:off x="914400" y="1508760"/>
+            <a:off x="914400" y="1783080"/>
             <a:ext cx="10360152" cy="1097280"/>
           </a:xfrm>
           <a:prstGeom prst="rect">
@@ -6978,8 +8127,8 @@
         </p:nvSpPr>
         <p:spPr>
           <a:xfrm>
-            <a:off x="2436876" y="3063240"/>
-            <a:ext cx="7315200" cy="2285999"/>
+            <a:off x="2436876" y="3337560"/>
+            <a:ext cx="7315200" cy="1828800"/>
           </a:xfrm>
           <a:prstGeom prst="roundRect">
             <a:avLst/>
@@ -7021,8 +8170,8 @@
         </p:nvSpPr>
         <p:spPr>
           <a:xfrm>
-            <a:off x="2894076" y="3337560"/>
-            <a:ext cx="6400800" cy="1737360"/>
+            <a:off x="2894076" y="3611879"/>
+            <a:ext cx="6400800" cy="1280160"/>
           </a:xfrm>
           <a:prstGeom prst="rect">
             <a:avLst/>
@@ -7041,13 +8190,13 @@
               </a:spcAft>
             </a:pPr>
             <a:r>
-              <a:rPr sz="1800" b="0">
+              <a:rPr sz="2000" b="0">
                 <a:solidFill>
                   <a:srgbClr val="0C4A6E"/>
                 </a:solidFill>
                 <a:latin typeface="Arial"/>
               </a:rPr>
-              <a:t>BTVN: Vẽ sơ đồ Input/Output</a:t>
+              <a:t>BTVN: Vẽ sơ đồ khối các thiết bị</a:t>
             </a:r>
           </a:p>
           <a:p>
@@ -7057,29 +8206,13 @@
               </a:spcAft>
             </a:pPr>
             <a:r>
-              <a:rPr sz="1800" b="0">
+              <a:rPr sz="2000" b="0">
                 <a:solidFill>
                   <a:srgbClr val="0C4A6E"/>
                 </a:solidFill>
                 <a:latin typeface="Arial"/>
               </a:rPr>
-              <a:t>của hệ thống máy tính</a:t>
-            </a:r>
-          </a:p>
-          <a:p>
-            <a:pPr algn="ctr">
-              <a:spcAft>
-                <a:spcPts val="600"/>
-              </a:spcAft>
-            </a:pPr>
-            <a:r>
-              <a:rPr sz="1800" b="0">
-                <a:solidFill>
-                  <a:srgbClr val="0C4A6E"/>
-                </a:solidFill>
-                <a:latin typeface="Arial"/>
-              </a:rPr>
-              <a:t>tại phòng Tin học.</a:t>
+              <a:t>Vào - Ra của máy tính ở phòng máy!</a:t>
             </a:r>
           </a:p>
         </p:txBody>
